--- a/documentacion/presentacion/defensa_fraude.pptx
+++ b/documentacion/presentacion/defensa_fraude.pptx
@@ -3335,7 +3335,7 @@
                 </a:solidFill>
                 <a:latin typeface="Arial"/>
               </a:rPr>
-              <a:t>Integrantes: [nombre 1] · [nombre 2]</a:t>
+              <a:t>Integrantes: Fernando Valdés Gomez · Juan Muñoz Veloso</a:t>
             </a:r>
           </a:p>
         </p:txBody>

--- a/documentacion/presentacion/defensa_fraude.pptx
+++ b/documentacion/presentacion/defensa_fraude.pptx
@@ -3116,7 +3116,7 @@
             <a:avLst/>
           </a:prstGeom>
           <a:solidFill>
-            <a:srgbClr val="121B2A"/>
+            <a:srgbClr val="FFFFFF"/>
           </a:solidFill>
           <a:ln>
             <a:noFill/>
@@ -3174,7 +3174,7 @@
             <a:r>
               <a:rPr sz="1100" b="1">
                 <a:solidFill>
-                  <a:srgbClr val="4AB8A7"/>
+                  <a:srgbClr val="2E6F9E"/>
                 </a:solidFill>
                 <a:latin typeface="Arial"/>
               </a:rPr>
@@ -3213,7 +3213,7 @@
             <a:r>
               <a:rPr sz="3800" b="1">
                 <a:solidFill>
-                  <a:srgbClr val="EBF0F6"/>
+                  <a:srgbClr val="263238"/>
                 </a:solidFill>
                 <a:latin typeface="Arial"/>
               </a:rPr>
@@ -3253,7 +3253,7 @@
             <a:r>
               <a:rPr sz="2000" b="0">
                 <a:solidFill>
-                  <a:srgbClr val="ABB9C7"/>
+                  <a:srgbClr val="64748B"/>
                 </a:solidFill>
                 <a:latin typeface="Arial"/>
               </a:rPr>
@@ -3292,7 +3292,7 @@
             <a:r>
               <a:rPr sz="1700" b="1">
                 <a:solidFill>
-                  <a:srgbClr val="E8874B"/>
+                  <a:srgbClr val="A8B4C0"/>
                 </a:solidFill>
                 <a:latin typeface="Arial"/>
               </a:rPr>
@@ -3331,7 +3331,7 @@
             <a:r>
               <a:rPr sz="1300" b="0">
                 <a:solidFill>
-                  <a:srgbClr val="ABB9C7"/>
+                  <a:srgbClr val="64748B"/>
                 </a:solidFill>
                 <a:latin typeface="Arial"/>
               </a:rPr>
@@ -3355,7 +3355,7 @@
             <a:avLst/>
           </a:prstGeom>
           <a:solidFill>
-            <a:srgbClr val="1C2A3D"/>
+            <a:srgbClr val="F1F5F9"/>
           </a:solidFill>
           <a:ln>
             <a:noFill/>
@@ -3413,7 +3413,7 @@
             <a:r>
               <a:rPr sz="2500" b="1">
                 <a:solidFill>
-                  <a:srgbClr val="4AB8A7"/>
+                  <a:srgbClr val="2E6F9E"/>
                 </a:solidFill>
                 <a:latin typeface="Arial"/>
               </a:rPr>
@@ -3452,7 +3452,7 @@
             <a:r>
               <a:rPr sz="1200" b="1">
                 <a:solidFill>
-                  <a:srgbClr val="EBF0F6"/>
+                  <a:srgbClr val="263238"/>
                 </a:solidFill>
                 <a:latin typeface="Arial"/>
               </a:rPr>
@@ -3476,7 +3476,7 @@
             <a:avLst/>
           </a:prstGeom>
           <a:solidFill>
-            <a:srgbClr val="1C2A3D"/>
+            <a:srgbClr val="F1F5F9"/>
           </a:solidFill>
           <a:ln>
             <a:noFill/>
@@ -3534,7 +3534,7 @@
             <a:r>
               <a:rPr sz="2500" b="1">
                 <a:solidFill>
-                  <a:srgbClr val="E8874B"/>
+                  <a:srgbClr val="A8B4C0"/>
                 </a:solidFill>
                 <a:latin typeface="Arial"/>
               </a:rPr>
@@ -3573,7 +3573,7 @@
             <a:r>
               <a:rPr sz="1200" b="1">
                 <a:solidFill>
-                  <a:srgbClr val="EBF0F6"/>
+                  <a:srgbClr val="263238"/>
                 </a:solidFill>
                 <a:latin typeface="Arial"/>
               </a:rPr>
@@ -3612,7 +3612,7 @@
             <a:r>
               <a:rPr sz="1200" b="0">
                 <a:solidFill>
-                  <a:srgbClr val="ABB9C7"/>
+                  <a:srgbClr val="64748B"/>
                 </a:solidFill>
                 <a:latin typeface="Arial"/>
               </a:rPr>
@@ -3654,7 +3654,7 @@
             <a:avLst/>
           </a:prstGeom>
           <a:solidFill>
-            <a:srgbClr val="121B2A"/>
+            <a:srgbClr val="FFFFFF"/>
           </a:solidFill>
           <a:ln>
             <a:noFill/>
@@ -3712,7 +3712,7 @@
             <a:r>
               <a:rPr sz="1000" b="1">
                 <a:solidFill>
-                  <a:srgbClr val="4AB8A7"/>
+                  <a:srgbClr val="2E6F9E"/>
                 </a:solidFill>
                 <a:latin typeface="Arial"/>
               </a:rPr>
@@ -3751,7 +3751,7 @@
             <a:r>
               <a:rPr sz="2600" b="1">
                 <a:solidFill>
-                  <a:srgbClr val="EBF0F6"/>
+                  <a:srgbClr val="263238"/>
                 </a:solidFill>
                 <a:latin typeface="Arial"/>
               </a:rPr>
@@ -3775,7 +3775,7 @@
             <a:avLst/>
           </a:prstGeom>
           <a:solidFill>
-            <a:srgbClr val="1C2A3D"/>
+            <a:srgbClr val="F1F5F9"/>
           </a:solidFill>
           <a:ln>
             <a:noFill/>
@@ -3833,7 +3833,7 @@
             <a:r>
               <a:rPr sz="900" b="0">
                 <a:solidFill>
-                  <a:srgbClr val="ABB9C7"/>
+                  <a:srgbClr val="64748B"/>
                 </a:solidFill>
                 <a:latin typeface="Arial"/>
               </a:rPr>
@@ -3872,7 +3872,7 @@
             <a:r>
               <a:rPr sz="1000" b="0">
                 <a:solidFill>
-                  <a:srgbClr val="ABB9C7"/>
+                  <a:srgbClr val="64748B"/>
                 </a:solidFill>
                 <a:latin typeface="Arial"/>
               </a:rPr>
@@ -3920,7 +3920,7 @@
             <a:avLst/>
           </a:prstGeom>
           <a:solidFill>
-            <a:srgbClr val="1C2A3D"/>
+            <a:srgbClr val="F1F5F9"/>
           </a:solidFill>
           <a:ln>
             <a:noFill/>
@@ -3978,7 +3978,7 @@
             <a:r>
               <a:rPr sz="2500" b="1">
                 <a:solidFill>
-                  <a:srgbClr val="4AB8A7"/>
+                  <a:srgbClr val="2E6F9E"/>
                 </a:solidFill>
                 <a:latin typeface="Arial"/>
               </a:rPr>
@@ -4017,7 +4017,7 @@
             <a:r>
               <a:rPr sz="1200" b="1">
                 <a:solidFill>
-                  <a:srgbClr val="EBF0F6"/>
+                  <a:srgbClr val="263238"/>
                 </a:solidFill>
                 <a:latin typeface="Arial"/>
               </a:rPr>
@@ -4041,7 +4041,7 @@
             <a:avLst/>
           </a:prstGeom>
           <a:solidFill>
-            <a:srgbClr val="1C2A3D"/>
+            <a:srgbClr val="F1F5F9"/>
           </a:solidFill>
           <a:ln>
             <a:noFill/>
@@ -4099,7 +4099,7 @@
             <a:r>
               <a:rPr sz="2500" b="1">
                 <a:solidFill>
-                  <a:srgbClr val="E8874B"/>
+                  <a:srgbClr val="A8B4C0"/>
                 </a:solidFill>
                 <a:latin typeface="Arial"/>
               </a:rPr>
@@ -4138,7 +4138,7 @@
             <a:r>
               <a:rPr sz="1200" b="1">
                 <a:solidFill>
-                  <a:srgbClr val="EBF0F6"/>
+                  <a:srgbClr val="263238"/>
                 </a:solidFill>
                 <a:latin typeface="Arial"/>
               </a:rPr>
@@ -4162,7 +4162,7 @@
             <a:avLst/>
           </a:prstGeom>
           <a:solidFill>
-            <a:srgbClr val="1C2A3D"/>
+            <a:srgbClr val="F1F5F9"/>
           </a:solidFill>
           <a:ln>
             <a:noFill/>
@@ -4220,7 +4220,7 @@
             <a:r>
               <a:rPr sz="2500" b="1">
                 <a:solidFill>
-                  <a:srgbClr val="E8874B"/>
+                  <a:srgbClr val="A8B4C0"/>
                 </a:solidFill>
                 <a:latin typeface="Arial"/>
               </a:rPr>
@@ -4259,7 +4259,7 @@
             <a:r>
               <a:rPr sz="1200" b="1">
                 <a:solidFill>
-                  <a:srgbClr val="EBF0F6"/>
+                  <a:srgbClr val="263238"/>
                 </a:solidFill>
                 <a:latin typeface="Arial"/>
               </a:rPr>
@@ -4283,7 +4283,7 @@
             <a:avLst/>
           </a:prstGeom>
           <a:solidFill>
-            <a:srgbClr val="1C2A3D"/>
+            <a:srgbClr val="F1F5F9"/>
           </a:solidFill>
           <a:ln>
             <a:noFill/>
@@ -4341,7 +4341,7 @@
             <a:r>
               <a:rPr sz="2500" b="1">
                 <a:solidFill>
-                  <a:srgbClr val="4AB8A7"/>
+                  <a:srgbClr val="2E6F9E"/>
                 </a:solidFill>
                 <a:latin typeface="Arial"/>
               </a:rPr>
@@ -4380,7 +4380,7 @@
             <a:r>
               <a:rPr sz="1200" b="1">
                 <a:solidFill>
-                  <a:srgbClr val="EBF0F6"/>
+                  <a:srgbClr val="263238"/>
                 </a:solidFill>
                 <a:latin typeface="Arial"/>
               </a:rPr>
@@ -4419,7 +4419,7 @@
             <a:r>
               <a:rPr sz="1200" b="0">
                 <a:solidFill>
-                  <a:srgbClr val="ABB9C7"/>
+                  <a:srgbClr val="64748B"/>
                 </a:solidFill>
                 <a:latin typeface="Arial"/>
               </a:rPr>
@@ -4461,7 +4461,7 @@
             <a:avLst/>
           </a:prstGeom>
           <a:solidFill>
-            <a:srgbClr val="121B2A"/>
+            <a:srgbClr val="FFFFFF"/>
           </a:solidFill>
           <a:ln>
             <a:noFill/>
@@ -4519,7 +4519,7 @@
             <a:r>
               <a:rPr sz="1000" b="1">
                 <a:solidFill>
-                  <a:srgbClr val="4AB8A7"/>
+                  <a:srgbClr val="2E6F9E"/>
                 </a:solidFill>
                 <a:latin typeface="Arial"/>
               </a:rPr>
@@ -4558,7 +4558,7 @@
             <a:r>
               <a:rPr sz="2600" b="1">
                 <a:solidFill>
-                  <a:srgbClr val="EBF0F6"/>
+                  <a:srgbClr val="263238"/>
                 </a:solidFill>
                 <a:latin typeface="Arial"/>
               </a:rPr>
@@ -4582,7 +4582,7 @@
             <a:avLst/>
           </a:prstGeom>
           <a:solidFill>
-            <a:srgbClr val="1C2A3D"/>
+            <a:srgbClr val="F1F5F9"/>
           </a:solidFill>
           <a:ln>
             <a:noFill/>
@@ -4640,7 +4640,7 @@
             <a:r>
               <a:rPr sz="900" b="0">
                 <a:solidFill>
-                  <a:srgbClr val="ABB9C7"/>
+                  <a:srgbClr val="64748B"/>
                 </a:solidFill>
                 <a:latin typeface="Arial"/>
               </a:rPr>
@@ -4679,7 +4679,7 @@
             <a:r>
               <a:rPr sz="1000" b="0">
                 <a:solidFill>
-                  <a:srgbClr val="ABB9C7"/>
+                  <a:srgbClr val="64748B"/>
                 </a:solidFill>
                 <a:latin typeface="Arial"/>
               </a:rPr>
@@ -4703,7 +4703,7 @@
             <a:avLst/>
           </a:prstGeom>
           <a:solidFill>
-            <a:srgbClr val="1C2A3D"/>
+            <a:srgbClr val="F1F5F9"/>
           </a:solidFill>
           <a:ln>
             <a:noFill/>
@@ -4761,7 +4761,7 @@
             <a:r>
               <a:rPr sz="2500" b="1">
                 <a:solidFill>
-                  <a:srgbClr val="E8874B"/>
+                  <a:srgbClr val="A8B4C0"/>
                 </a:solidFill>
                 <a:latin typeface="Arial"/>
               </a:rPr>
@@ -4800,7 +4800,7 @@
             <a:r>
               <a:rPr sz="1200" b="1">
                 <a:solidFill>
-                  <a:srgbClr val="EBF0F6"/>
+                  <a:srgbClr val="263238"/>
                 </a:solidFill>
                 <a:latin typeface="Arial"/>
               </a:rPr>
@@ -4839,7 +4839,7 @@
             <a:r>
               <a:rPr sz="1000" b="0">
                 <a:solidFill>
-                  <a:srgbClr val="ABB9C7"/>
+                  <a:srgbClr val="64748B"/>
                 </a:solidFill>
                 <a:latin typeface="Arial"/>
               </a:rPr>
@@ -4863,7 +4863,7 @@
             <a:avLst/>
           </a:prstGeom>
           <a:solidFill>
-            <a:srgbClr val="1C2A3D"/>
+            <a:srgbClr val="F1F5F9"/>
           </a:solidFill>
           <a:ln>
             <a:noFill/>
@@ -4921,7 +4921,7 @@
             <a:r>
               <a:rPr sz="2500" b="1">
                 <a:solidFill>
-                  <a:srgbClr val="4AB8A7"/>
+                  <a:srgbClr val="2E6F9E"/>
                 </a:solidFill>
                 <a:latin typeface="Arial"/>
               </a:rPr>
@@ -4960,7 +4960,7 @@
             <a:r>
               <a:rPr sz="1200" b="1">
                 <a:solidFill>
-                  <a:srgbClr val="EBF0F6"/>
+                  <a:srgbClr val="263238"/>
                 </a:solidFill>
                 <a:latin typeface="Arial"/>
               </a:rPr>
@@ -4999,7 +4999,7 @@
             <a:r>
               <a:rPr sz="1000" b="0">
                 <a:solidFill>
-                  <a:srgbClr val="ABB9C7"/>
+                  <a:srgbClr val="64748B"/>
                 </a:solidFill>
                 <a:latin typeface="Arial"/>
               </a:rPr>
@@ -5023,7 +5023,7 @@
             <a:avLst/>
           </a:prstGeom>
           <a:solidFill>
-            <a:srgbClr val="1C2A3D"/>
+            <a:srgbClr val="F1F5F9"/>
           </a:solidFill>
           <a:ln>
             <a:noFill/>
@@ -5081,7 +5081,7 @@
             <a:r>
               <a:rPr sz="2500" b="1">
                 <a:solidFill>
-                  <a:srgbClr val="E8874B"/>
+                  <a:srgbClr val="A8B4C0"/>
                 </a:solidFill>
                 <a:latin typeface="Arial"/>
               </a:rPr>
@@ -5120,7 +5120,7 @@
             <a:r>
               <a:rPr sz="1200" b="1">
                 <a:solidFill>
-                  <a:srgbClr val="EBF0F6"/>
+                  <a:srgbClr val="263238"/>
                 </a:solidFill>
                 <a:latin typeface="Arial"/>
               </a:rPr>
@@ -5159,7 +5159,7 @@
             <a:r>
               <a:rPr sz="1000" b="0">
                 <a:solidFill>
-                  <a:srgbClr val="ABB9C7"/>
+                  <a:srgbClr val="64748B"/>
                 </a:solidFill>
                 <a:latin typeface="Arial"/>
               </a:rPr>
@@ -5183,7 +5183,7 @@
             <a:avLst/>
           </a:prstGeom>
           <a:solidFill>
-            <a:srgbClr val="E8874B"/>
+            <a:srgbClr val="A8B4C0"/>
           </a:solidFill>
           <a:ln>
             <a:noFill/>
@@ -5241,7 +5241,7 @@
             <a:r>
               <a:rPr sz="1400" b="0">
                 <a:solidFill>
-                  <a:srgbClr val="EBF0F6"/>
+                  <a:srgbClr val="263238"/>
                 </a:solidFill>
                 <a:latin typeface="Arial"/>
               </a:rPr>
@@ -5265,7 +5265,7 @@
             <a:avLst/>
           </a:prstGeom>
           <a:solidFill>
-            <a:srgbClr val="4AB8A7"/>
+            <a:srgbClr val="2E6F9E"/>
           </a:solidFill>
           <a:ln>
             <a:noFill/>
@@ -5323,7 +5323,7 @@
             <a:r>
               <a:rPr sz="1400" b="0">
                 <a:solidFill>
-                  <a:srgbClr val="EBF0F6"/>
+                  <a:srgbClr val="263238"/>
                 </a:solidFill>
                 <a:latin typeface="Arial"/>
               </a:rPr>
@@ -5347,7 +5347,7 @@
             <a:avLst/>
           </a:prstGeom>
           <a:solidFill>
-            <a:srgbClr val="4AB8A7"/>
+            <a:srgbClr val="2E6F9E"/>
           </a:solidFill>
           <a:ln>
             <a:noFill/>
@@ -5405,7 +5405,7 @@
             <a:r>
               <a:rPr sz="1400" b="0">
                 <a:solidFill>
-                  <a:srgbClr val="EBF0F6"/>
+                  <a:srgbClr val="263238"/>
                 </a:solidFill>
                 <a:latin typeface="Arial"/>
               </a:rPr>
@@ -5447,7 +5447,7 @@
             <a:avLst/>
           </a:prstGeom>
           <a:solidFill>
-            <a:srgbClr val="121B2A"/>
+            <a:srgbClr val="FFFFFF"/>
           </a:solidFill>
           <a:ln>
             <a:noFill/>
@@ -5505,7 +5505,7 @@
             <a:r>
               <a:rPr sz="1000" b="1">
                 <a:solidFill>
-                  <a:srgbClr val="4AB8A7"/>
+                  <a:srgbClr val="2E6F9E"/>
                 </a:solidFill>
                 <a:latin typeface="Arial"/>
               </a:rPr>
@@ -5544,7 +5544,7 @@
             <a:r>
               <a:rPr sz="2600" b="1">
                 <a:solidFill>
-                  <a:srgbClr val="EBF0F6"/>
+                  <a:srgbClr val="263238"/>
                 </a:solidFill>
                 <a:latin typeface="Arial"/>
               </a:rPr>
@@ -5568,7 +5568,7 @@
             <a:avLst/>
           </a:prstGeom>
           <a:solidFill>
-            <a:srgbClr val="1C2A3D"/>
+            <a:srgbClr val="F1F5F9"/>
           </a:solidFill>
           <a:ln>
             <a:noFill/>
@@ -5626,7 +5626,7 @@
             <a:r>
               <a:rPr sz="900" b="0">
                 <a:solidFill>
-                  <a:srgbClr val="ABB9C7"/>
+                  <a:srgbClr val="64748B"/>
                 </a:solidFill>
                 <a:latin typeface="Arial"/>
               </a:rPr>
@@ -5665,7 +5665,7 @@
             <a:r>
               <a:rPr sz="1000" b="0">
                 <a:solidFill>
-                  <a:srgbClr val="ABB9C7"/>
+                  <a:srgbClr val="64748B"/>
                 </a:solidFill>
                 <a:latin typeface="Arial"/>
               </a:rPr>
@@ -5689,7 +5689,7 @@
             <a:avLst/>
           </a:prstGeom>
           <a:solidFill>
-            <a:srgbClr val="1C2A3D"/>
+            <a:srgbClr val="F1F5F9"/>
           </a:solidFill>
           <a:ln>
             <a:noFill/>
@@ -5747,7 +5747,7 @@
             <a:r>
               <a:rPr sz="2500" b="1">
                 <a:solidFill>
-                  <a:srgbClr val="4AB8A7"/>
+                  <a:srgbClr val="2E6F9E"/>
                 </a:solidFill>
                 <a:latin typeface="Arial"/>
               </a:rPr>
@@ -5786,7 +5786,7 @@
             <a:r>
               <a:rPr sz="1200" b="1">
                 <a:solidFill>
-                  <a:srgbClr val="EBF0F6"/>
+                  <a:srgbClr val="263238"/>
                 </a:solidFill>
                 <a:latin typeface="Arial"/>
               </a:rPr>
@@ -5825,7 +5825,7 @@
             <a:r>
               <a:rPr sz="1000" b="0">
                 <a:solidFill>
-                  <a:srgbClr val="ABB9C7"/>
+                  <a:srgbClr val="64748B"/>
                 </a:solidFill>
                 <a:latin typeface="Arial"/>
               </a:rPr>
@@ -5849,7 +5849,7 @@
             <a:avLst/>
           </a:prstGeom>
           <a:solidFill>
-            <a:srgbClr val="E8874B"/>
+            <a:srgbClr val="A8B4C0"/>
           </a:solidFill>
           <a:ln>
             <a:noFill/>
@@ -5907,7 +5907,7 @@
             <a:r>
               <a:rPr sz="1400" b="0">
                 <a:solidFill>
-                  <a:srgbClr val="EBF0F6"/>
+                  <a:srgbClr val="263238"/>
                 </a:solidFill>
                 <a:latin typeface="Arial"/>
               </a:rPr>
@@ -5931,7 +5931,7 @@
             <a:avLst/>
           </a:prstGeom>
           <a:solidFill>
-            <a:srgbClr val="4AB8A7"/>
+            <a:srgbClr val="2E6F9E"/>
           </a:solidFill>
           <a:ln>
             <a:noFill/>
@@ -5989,7 +5989,7 @@
             <a:r>
               <a:rPr sz="1400" b="0">
                 <a:solidFill>
-                  <a:srgbClr val="EBF0F6"/>
+                  <a:srgbClr val="263238"/>
                 </a:solidFill>
                 <a:latin typeface="Arial"/>
               </a:rPr>
@@ -6013,7 +6013,7 @@
             <a:avLst/>
           </a:prstGeom>
           <a:solidFill>
-            <a:srgbClr val="4AB8A7"/>
+            <a:srgbClr val="2E6F9E"/>
           </a:solidFill>
           <a:ln>
             <a:noFill/>
@@ -6071,7 +6071,7 @@
             <a:r>
               <a:rPr sz="1400" b="0">
                 <a:solidFill>
-                  <a:srgbClr val="EBF0F6"/>
+                  <a:srgbClr val="263238"/>
                 </a:solidFill>
                 <a:latin typeface="Arial"/>
               </a:rPr>
@@ -6095,7 +6095,7 @@
             <a:avLst/>
           </a:prstGeom>
           <a:solidFill>
-            <a:srgbClr val="4AB8A7"/>
+            <a:srgbClr val="2E6F9E"/>
           </a:solidFill>
           <a:ln>
             <a:noFill/>
@@ -6153,7 +6153,7 @@
             <a:r>
               <a:rPr sz="1400" b="0">
                 <a:solidFill>
-                  <a:srgbClr val="EBF0F6"/>
+                  <a:srgbClr val="263238"/>
                 </a:solidFill>
                 <a:latin typeface="Arial"/>
               </a:rPr>
@@ -6177,7 +6177,7 @@
             <a:avLst/>
           </a:prstGeom>
           <a:solidFill>
-            <a:srgbClr val="4AB8A7"/>
+            <a:srgbClr val="2E6F9E"/>
           </a:solidFill>
           <a:ln>
             <a:noFill/>
@@ -6235,7 +6235,7 @@
             <a:r>
               <a:rPr sz="1400" b="0">
                 <a:solidFill>
-                  <a:srgbClr val="EBF0F6"/>
+                  <a:srgbClr val="263238"/>
                 </a:solidFill>
                 <a:latin typeface="Arial"/>
               </a:rPr>
@@ -6274,7 +6274,7 @@
             <a:r>
               <a:rPr sz="1300" b="0">
                 <a:solidFill>
-                  <a:srgbClr val="ABB9C7"/>
+                  <a:srgbClr val="64748B"/>
                 </a:solidFill>
                 <a:latin typeface="Arial"/>
               </a:rPr>
@@ -6316,7 +6316,7 @@
             <a:avLst/>
           </a:prstGeom>
           <a:solidFill>
-            <a:srgbClr val="121B2A"/>
+            <a:srgbClr val="FFFFFF"/>
           </a:solidFill>
           <a:ln>
             <a:noFill/>
@@ -6374,7 +6374,7 @@
             <a:r>
               <a:rPr sz="1000" b="1">
                 <a:solidFill>
-                  <a:srgbClr val="4AB8A7"/>
+                  <a:srgbClr val="2E6F9E"/>
                 </a:solidFill>
                 <a:latin typeface="Arial"/>
               </a:rPr>
@@ -6413,7 +6413,7 @@
             <a:r>
               <a:rPr sz="2600" b="1">
                 <a:solidFill>
-                  <a:srgbClr val="EBF0F6"/>
+                  <a:srgbClr val="263238"/>
                 </a:solidFill>
                 <a:latin typeface="Arial"/>
               </a:rPr>
@@ -6452,7 +6452,7 @@
             <a:r>
               <a:rPr sz="1200" b="0">
                 <a:solidFill>
-                  <a:srgbClr val="ABB9C7"/>
+                  <a:srgbClr val="64748B"/>
                 </a:solidFill>
                 <a:latin typeface="Arial"/>
               </a:rPr>
@@ -6476,7 +6476,7 @@
             <a:avLst/>
           </a:prstGeom>
           <a:solidFill>
-            <a:srgbClr val="1C2A3D"/>
+            <a:srgbClr val="F1F5F9"/>
           </a:solidFill>
           <a:ln>
             <a:noFill/>
@@ -6534,7 +6534,7 @@
             <a:r>
               <a:rPr sz="900" b="0">
                 <a:solidFill>
-                  <a:srgbClr val="ABB9C7"/>
+                  <a:srgbClr val="64748B"/>
                 </a:solidFill>
                 <a:latin typeface="Arial"/>
               </a:rPr>
@@ -6573,7 +6573,7 @@
             <a:r>
               <a:rPr sz="1000" b="0">
                 <a:solidFill>
-                  <a:srgbClr val="ABB9C7"/>
+                  <a:srgbClr val="64748B"/>
                 </a:solidFill>
                 <a:latin typeface="Arial"/>
               </a:rPr>
@@ -6617,7 +6617,7 @@
                       <a:r>
                         <a:rPr sz="1000" b="1">
                           <a:solidFill>
-                            <a:srgbClr val="EBF0F6"/>
+                            <a:srgbClr val="263238"/>
                           </a:solidFill>
                           <a:latin typeface="Arial"/>
                         </a:rPr>
@@ -6627,7 +6627,7 @@
                   </a:txBody>
                   <a:tcPr marL="54864" marR="45720" marT="22860" marB="22860">
                     <a:solidFill>
-                      <a:srgbClr val="2A3E52"/>
+                      <a:srgbClr val="DCE8F1"/>
                     </a:solidFill>
                   </a:tcPr>
                 </a:tc>
@@ -6640,7 +6640,7 @@
                       <a:r>
                         <a:rPr sz="1000" b="1">
                           <a:solidFill>
-                            <a:srgbClr val="EBF0F6"/>
+                            <a:srgbClr val="263238"/>
                           </a:solidFill>
                           <a:latin typeface="Arial"/>
                         </a:rPr>
@@ -6650,7 +6650,7 @@
                   </a:txBody>
                   <a:tcPr marL="54864" marR="45720" marT="22860" marB="22860">
                     <a:solidFill>
-                      <a:srgbClr val="2A3E52"/>
+                      <a:srgbClr val="DCE8F1"/>
                     </a:solidFill>
                   </a:tcPr>
                 </a:tc>
@@ -6663,7 +6663,7 @@
                       <a:r>
                         <a:rPr sz="1000" b="1">
                           <a:solidFill>
-                            <a:srgbClr val="EBF0F6"/>
+                            <a:srgbClr val="263238"/>
                           </a:solidFill>
                           <a:latin typeface="Arial"/>
                         </a:rPr>
@@ -6673,7 +6673,7 @@
                   </a:txBody>
                   <a:tcPr marL="54864" marR="45720" marT="22860" marB="22860">
                     <a:solidFill>
-                      <a:srgbClr val="2A3E52"/>
+                      <a:srgbClr val="DCE8F1"/>
                     </a:solidFill>
                   </a:tcPr>
                 </a:tc>
@@ -6686,7 +6686,7 @@
                       <a:r>
                         <a:rPr sz="1000" b="1">
                           <a:solidFill>
-                            <a:srgbClr val="EBF0F6"/>
+                            <a:srgbClr val="263238"/>
                           </a:solidFill>
                           <a:latin typeface="Arial"/>
                         </a:rPr>
@@ -6696,7 +6696,7 @@
                   </a:txBody>
                   <a:tcPr marL="54864" marR="45720" marT="22860" marB="22860">
                     <a:solidFill>
-                      <a:srgbClr val="2A3E52"/>
+                      <a:srgbClr val="DCE8F1"/>
                     </a:solidFill>
                   </a:tcPr>
                 </a:tc>
@@ -6709,7 +6709,7 @@
                       <a:r>
                         <a:rPr sz="1000" b="1">
                           <a:solidFill>
-                            <a:srgbClr val="EBF0F6"/>
+                            <a:srgbClr val="263238"/>
                           </a:solidFill>
                           <a:latin typeface="Arial"/>
                         </a:rPr>
@@ -6719,7 +6719,7 @@
                   </a:txBody>
                   <a:tcPr marL="54864" marR="45720" marT="22860" marB="22860">
                     <a:solidFill>
-                      <a:srgbClr val="2A3E52"/>
+                      <a:srgbClr val="DCE8F1"/>
                     </a:solidFill>
                   </a:tcPr>
                 </a:tc>
@@ -6734,7 +6734,7 @@
                       <a:r>
                         <a:rPr sz="1000" b="0">
                           <a:solidFill>
-                            <a:srgbClr val="ABB9C7"/>
+                            <a:srgbClr val="64748B"/>
                           </a:solidFill>
                           <a:latin typeface="Arial"/>
                         </a:rPr>
@@ -6744,7 +6744,7 @@
                   </a:txBody>
                   <a:tcPr marL="54864" marR="45720" marT="22860" marB="22860">
                     <a:solidFill>
-                      <a:srgbClr val="1C2A3D"/>
+                      <a:srgbClr val="F1F5F9"/>
                     </a:solidFill>
                   </a:tcPr>
                 </a:tc>
@@ -6757,7 +6757,7 @@
                       <a:r>
                         <a:rPr sz="1000" b="0">
                           <a:solidFill>
-                            <a:srgbClr val="ABB9C7"/>
+                            <a:srgbClr val="64748B"/>
                           </a:solidFill>
                           <a:latin typeface="Arial"/>
                         </a:rPr>
@@ -6767,7 +6767,7 @@
                   </a:txBody>
                   <a:tcPr marL="54864" marR="45720" marT="22860" marB="22860">
                     <a:solidFill>
-                      <a:srgbClr val="1C2A3D"/>
+                      <a:srgbClr val="F1F5F9"/>
                     </a:solidFill>
                   </a:tcPr>
                 </a:tc>
@@ -6780,7 +6780,7 @@
                       <a:r>
                         <a:rPr sz="1000" b="0">
                           <a:solidFill>
-                            <a:srgbClr val="ABB9C7"/>
+                            <a:srgbClr val="64748B"/>
                           </a:solidFill>
                           <a:latin typeface="Arial"/>
                         </a:rPr>
@@ -6790,7 +6790,7 @@
                   </a:txBody>
                   <a:tcPr marL="54864" marR="45720" marT="22860" marB="22860">
                     <a:solidFill>
-                      <a:srgbClr val="1C2A3D"/>
+                      <a:srgbClr val="F1F5F9"/>
                     </a:solidFill>
                   </a:tcPr>
                 </a:tc>
@@ -6803,7 +6803,7 @@
                       <a:r>
                         <a:rPr sz="1000" b="0">
                           <a:solidFill>
-                            <a:srgbClr val="ABB9C7"/>
+                            <a:srgbClr val="64748B"/>
                           </a:solidFill>
                           <a:latin typeface="Arial"/>
                         </a:rPr>
@@ -6813,7 +6813,7 @@
                   </a:txBody>
                   <a:tcPr marL="54864" marR="45720" marT="22860" marB="22860">
                     <a:solidFill>
-                      <a:srgbClr val="1C2A3D"/>
+                      <a:srgbClr val="F1F5F9"/>
                     </a:solidFill>
                   </a:tcPr>
                 </a:tc>
@@ -6826,7 +6826,7 @@
                       <a:r>
                         <a:rPr sz="1000" b="0">
                           <a:solidFill>
-                            <a:srgbClr val="ABB9C7"/>
+                            <a:srgbClr val="64748B"/>
                           </a:solidFill>
                           <a:latin typeface="Arial"/>
                         </a:rPr>
@@ -6836,7 +6836,7 @@
                   </a:txBody>
                   <a:tcPr marL="54864" marR="45720" marT="22860" marB="22860">
                     <a:solidFill>
-                      <a:srgbClr val="1C2A3D"/>
+                      <a:srgbClr val="F1F5F9"/>
                     </a:solidFill>
                   </a:tcPr>
                 </a:tc>
@@ -6851,7 +6851,7 @@
                       <a:r>
                         <a:rPr sz="1000" b="0">
                           <a:solidFill>
-                            <a:srgbClr val="ABB9C7"/>
+                            <a:srgbClr val="64748B"/>
                           </a:solidFill>
                           <a:latin typeface="Arial"/>
                         </a:rPr>
@@ -6861,7 +6861,7 @@
                   </a:txBody>
                   <a:tcPr marL="54864" marR="45720" marT="22860" marB="22860">
                     <a:solidFill>
-                      <a:srgbClr val="1C2A3D"/>
+                      <a:srgbClr val="F1F5F9"/>
                     </a:solidFill>
                   </a:tcPr>
                 </a:tc>
@@ -6874,7 +6874,7 @@
                       <a:r>
                         <a:rPr sz="1000" b="0">
                           <a:solidFill>
-                            <a:srgbClr val="ABB9C7"/>
+                            <a:srgbClr val="64748B"/>
                           </a:solidFill>
                           <a:latin typeface="Arial"/>
                         </a:rPr>
@@ -6884,7 +6884,7 @@
                   </a:txBody>
                   <a:tcPr marL="54864" marR="45720" marT="22860" marB="22860">
                     <a:solidFill>
-                      <a:srgbClr val="1C2A3D"/>
+                      <a:srgbClr val="F1F5F9"/>
                     </a:solidFill>
                   </a:tcPr>
                 </a:tc>
@@ -6897,7 +6897,7 @@
                       <a:r>
                         <a:rPr sz="1000" b="0">
                           <a:solidFill>
-                            <a:srgbClr val="ABB9C7"/>
+                            <a:srgbClr val="64748B"/>
                           </a:solidFill>
                           <a:latin typeface="Arial"/>
                         </a:rPr>
@@ -6907,7 +6907,7 @@
                   </a:txBody>
                   <a:tcPr marL="54864" marR="45720" marT="22860" marB="22860">
                     <a:solidFill>
-                      <a:srgbClr val="1C2A3D"/>
+                      <a:srgbClr val="F1F5F9"/>
                     </a:solidFill>
                   </a:tcPr>
                 </a:tc>
@@ -6920,7 +6920,7 @@
                       <a:r>
                         <a:rPr sz="1000" b="0">
                           <a:solidFill>
-                            <a:srgbClr val="ABB9C7"/>
+                            <a:srgbClr val="64748B"/>
                           </a:solidFill>
                           <a:latin typeface="Arial"/>
                         </a:rPr>
@@ -6930,7 +6930,7 @@
                   </a:txBody>
                   <a:tcPr marL="54864" marR="45720" marT="22860" marB="22860">
                     <a:solidFill>
-                      <a:srgbClr val="1C2A3D"/>
+                      <a:srgbClr val="F1F5F9"/>
                     </a:solidFill>
                   </a:tcPr>
                 </a:tc>
@@ -6943,7 +6943,7 @@
                       <a:r>
                         <a:rPr sz="1000" b="0">
                           <a:solidFill>
-                            <a:srgbClr val="ABB9C7"/>
+                            <a:srgbClr val="64748B"/>
                           </a:solidFill>
                           <a:latin typeface="Arial"/>
                         </a:rPr>
@@ -6953,7 +6953,7 @@
                   </a:txBody>
                   <a:tcPr marL="54864" marR="45720" marT="22860" marB="22860">
                     <a:solidFill>
-                      <a:srgbClr val="1C2A3D"/>
+                      <a:srgbClr val="F1F5F9"/>
                     </a:solidFill>
                   </a:tcPr>
                 </a:tc>
@@ -6968,7 +6968,7 @@
                       <a:r>
                         <a:rPr sz="1000" b="0">
                           <a:solidFill>
-                            <a:srgbClr val="ABB9C7"/>
+                            <a:srgbClr val="64748B"/>
                           </a:solidFill>
                           <a:latin typeface="Arial"/>
                         </a:rPr>
@@ -6978,7 +6978,7 @@
                   </a:txBody>
                   <a:tcPr marL="54864" marR="45720" marT="22860" marB="22860">
                     <a:solidFill>
-                      <a:srgbClr val="1C2A3D"/>
+                      <a:srgbClr val="F1F5F9"/>
                     </a:solidFill>
                   </a:tcPr>
                 </a:tc>
@@ -6991,7 +6991,7 @@
                       <a:r>
                         <a:rPr sz="1000" b="0">
                           <a:solidFill>
-                            <a:srgbClr val="ABB9C7"/>
+                            <a:srgbClr val="64748B"/>
                           </a:solidFill>
                           <a:latin typeface="Arial"/>
                         </a:rPr>
@@ -7001,7 +7001,7 @@
                   </a:txBody>
                   <a:tcPr marL="54864" marR="45720" marT="22860" marB="22860">
                     <a:solidFill>
-                      <a:srgbClr val="1C2A3D"/>
+                      <a:srgbClr val="F1F5F9"/>
                     </a:solidFill>
                   </a:tcPr>
                 </a:tc>
@@ -7014,7 +7014,7 @@
                       <a:r>
                         <a:rPr sz="1000" b="0">
                           <a:solidFill>
-                            <a:srgbClr val="ABB9C7"/>
+                            <a:srgbClr val="64748B"/>
                           </a:solidFill>
                           <a:latin typeface="Arial"/>
                         </a:rPr>
@@ -7024,7 +7024,7 @@
                   </a:txBody>
                   <a:tcPr marL="54864" marR="45720" marT="22860" marB="22860">
                     <a:solidFill>
-                      <a:srgbClr val="1C2A3D"/>
+                      <a:srgbClr val="F1F5F9"/>
                     </a:solidFill>
                   </a:tcPr>
                 </a:tc>
@@ -7037,7 +7037,7 @@
                       <a:r>
                         <a:rPr sz="1000" b="0">
                           <a:solidFill>
-                            <a:srgbClr val="ABB9C7"/>
+                            <a:srgbClr val="64748B"/>
                           </a:solidFill>
                           <a:latin typeface="Arial"/>
                         </a:rPr>
@@ -7047,7 +7047,7 @@
                   </a:txBody>
                   <a:tcPr marL="54864" marR="45720" marT="22860" marB="22860">
                     <a:solidFill>
-                      <a:srgbClr val="1C2A3D"/>
+                      <a:srgbClr val="F1F5F9"/>
                     </a:solidFill>
                   </a:tcPr>
                 </a:tc>
@@ -7060,7 +7060,7 @@
                       <a:r>
                         <a:rPr sz="1000" b="0">
                           <a:solidFill>
-                            <a:srgbClr val="ABB9C7"/>
+                            <a:srgbClr val="64748B"/>
                           </a:solidFill>
                           <a:latin typeface="Arial"/>
                         </a:rPr>
@@ -7070,7 +7070,7 @@
                   </a:txBody>
                   <a:tcPr marL="54864" marR="45720" marT="22860" marB="22860">
                     <a:solidFill>
-                      <a:srgbClr val="1C2A3D"/>
+                      <a:srgbClr val="F1F5F9"/>
                     </a:solidFill>
                   </a:tcPr>
                 </a:tc>
@@ -7085,7 +7085,7 @@
                       <a:r>
                         <a:rPr sz="1000" b="0">
                           <a:solidFill>
-                            <a:srgbClr val="ABB9C7"/>
+                            <a:srgbClr val="64748B"/>
                           </a:solidFill>
                           <a:latin typeface="Arial"/>
                         </a:rPr>
@@ -7095,7 +7095,7 @@
                   </a:txBody>
                   <a:tcPr marL="54864" marR="45720" marT="22860" marB="22860">
                     <a:solidFill>
-                      <a:srgbClr val="1C2A3D"/>
+                      <a:srgbClr val="F1F5F9"/>
                     </a:solidFill>
                   </a:tcPr>
                 </a:tc>
@@ -7108,7 +7108,7 @@
                       <a:r>
                         <a:rPr sz="1000" b="0">
                           <a:solidFill>
-                            <a:srgbClr val="ABB9C7"/>
+                            <a:srgbClr val="64748B"/>
                           </a:solidFill>
                           <a:latin typeface="Arial"/>
                         </a:rPr>
@@ -7118,7 +7118,7 @@
                   </a:txBody>
                   <a:tcPr marL="54864" marR="45720" marT="22860" marB="22860">
                     <a:solidFill>
-                      <a:srgbClr val="1C2A3D"/>
+                      <a:srgbClr val="F1F5F9"/>
                     </a:solidFill>
                   </a:tcPr>
                 </a:tc>
@@ -7131,7 +7131,7 @@
                       <a:r>
                         <a:rPr sz="1000" b="0">
                           <a:solidFill>
-                            <a:srgbClr val="ABB9C7"/>
+                            <a:srgbClr val="64748B"/>
                           </a:solidFill>
                           <a:latin typeface="Arial"/>
                         </a:rPr>
@@ -7141,7 +7141,7 @@
                   </a:txBody>
                   <a:tcPr marL="54864" marR="45720" marT="22860" marB="22860">
                     <a:solidFill>
-                      <a:srgbClr val="1C2A3D"/>
+                      <a:srgbClr val="F1F5F9"/>
                     </a:solidFill>
                   </a:tcPr>
                 </a:tc>
@@ -7154,7 +7154,7 @@
                       <a:r>
                         <a:rPr sz="1000" b="0">
                           <a:solidFill>
-                            <a:srgbClr val="ABB9C7"/>
+                            <a:srgbClr val="64748B"/>
                           </a:solidFill>
                           <a:latin typeface="Arial"/>
                         </a:rPr>
@@ -7164,7 +7164,7 @@
                   </a:txBody>
                   <a:tcPr marL="54864" marR="45720" marT="22860" marB="22860">
                     <a:solidFill>
-                      <a:srgbClr val="1C2A3D"/>
+                      <a:srgbClr val="F1F5F9"/>
                     </a:solidFill>
                   </a:tcPr>
                 </a:tc>
@@ -7177,7 +7177,7 @@
                       <a:r>
                         <a:rPr sz="1000" b="0">
                           <a:solidFill>
-                            <a:srgbClr val="ABB9C7"/>
+                            <a:srgbClr val="64748B"/>
                           </a:solidFill>
                           <a:latin typeface="Arial"/>
                         </a:rPr>
@@ -7187,7 +7187,7 @@
                   </a:txBody>
                   <a:tcPr marL="54864" marR="45720" marT="22860" marB="22860">
                     <a:solidFill>
-                      <a:srgbClr val="1C2A3D"/>
+                      <a:srgbClr val="F1F5F9"/>
                     </a:solidFill>
                   </a:tcPr>
                 </a:tc>
@@ -7202,7 +7202,7 @@
                       <a:r>
                         <a:rPr sz="1000" b="0">
                           <a:solidFill>
-                            <a:srgbClr val="ABB9C7"/>
+                            <a:srgbClr val="64748B"/>
                           </a:solidFill>
                           <a:latin typeface="Arial"/>
                         </a:rPr>
@@ -7212,7 +7212,7 @@
                   </a:txBody>
                   <a:tcPr marL="54864" marR="45720" marT="22860" marB="22860">
                     <a:solidFill>
-                      <a:srgbClr val="1C2A3D"/>
+                      <a:srgbClr val="F1F5F9"/>
                     </a:solidFill>
                   </a:tcPr>
                 </a:tc>
@@ -7225,7 +7225,7 @@
                       <a:r>
                         <a:rPr sz="1000" b="0">
                           <a:solidFill>
-                            <a:srgbClr val="ABB9C7"/>
+                            <a:srgbClr val="64748B"/>
                           </a:solidFill>
                           <a:latin typeface="Arial"/>
                         </a:rPr>
@@ -7235,7 +7235,7 @@
                   </a:txBody>
                   <a:tcPr marL="54864" marR="45720" marT="22860" marB="22860">
                     <a:solidFill>
-                      <a:srgbClr val="1C2A3D"/>
+                      <a:srgbClr val="F1F5F9"/>
                     </a:solidFill>
                   </a:tcPr>
                 </a:tc>
@@ -7248,7 +7248,7 @@
                       <a:r>
                         <a:rPr sz="1000" b="0">
                           <a:solidFill>
-                            <a:srgbClr val="ABB9C7"/>
+                            <a:srgbClr val="64748B"/>
                           </a:solidFill>
                           <a:latin typeface="Arial"/>
                         </a:rPr>
@@ -7258,7 +7258,7 @@
                   </a:txBody>
                   <a:tcPr marL="54864" marR="45720" marT="22860" marB="22860">
                     <a:solidFill>
-                      <a:srgbClr val="1C2A3D"/>
+                      <a:srgbClr val="F1F5F9"/>
                     </a:solidFill>
                   </a:tcPr>
                 </a:tc>
@@ -7271,7 +7271,7 @@
                       <a:r>
                         <a:rPr sz="1000" b="0">
                           <a:solidFill>
-                            <a:srgbClr val="ABB9C7"/>
+                            <a:srgbClr val="64748B"/>
                           </a:solidFill>
                           <a:latin typeface="Arial"/>
                         </a:rPr>
@@ -7281,7 +7281,7 @@
                   </a:txBody>
                   <a:tcPr marL="54864" marR="45720" marT="22860" marB="22860">
                     <a:solidFill>
-                      <a:srgbClr val="1C2A3D"/>
+                      <a:srgbClr val="F1F5F9"/>
                     </a:solidFill>
                   </a:tcPr>
                 </a:tc>
@@ -7294,7 +7294,7 @@
                       <a:r>
                         <a:rPr sz="1000" b="0">
                           <a:solidFill>
-                            <a:srgbClr val="ABB9C7"/>
+                            <a:srgbClr val="64748B"/>
                           </a:solidFill>
                           <a:latin typeface="Arial"/>
                         </a:rPr>
@@ -7304,7 +7304,7 @@
                   </a:txBody>
                   <a:tcPr marL="54864" marR="45720" marT="22860" marB="22860">
                     <a:solidFill>
-                      <a:srgbClr val="1C2A3D"/>
+                      <a:srgbClr val="F1F5F9"/>
                     </a:solidFill>
                   </a:tcPr>
                 </a:tc>
@@ -7319,7 +7319,7 @@
                       <a:r>
                         <a:rPr sz="1000" b="0">
                           <a:solidFill>
-                            <a:srgbClr val="ABB9C7"/>
+                            <a:srgbClr val="64748B"/>
                           </a:solidFill>
                           <a:latin typeface="Arial"/>
                         </a:rPr>
@@ -7329,7 +7329,7 @@
                   </a:txBody>
                   <a:tcPr marL="54864" marR="45720" marT="22860" marB="22860">
                     <a:solidFill>
-                      <a:srgbClr val="1C2A3D"/>
+                      <a:srgbClr val="F1F5F9"/>
                     </a:solidFill>
                   </a:tcPr>
                 </a:tc>
@@ -7342,7 +7342,7 @@
                       <a:r>
                         <a:rPr sz="1000" b="0">
                           <a:solidFill>
-                            <a:srgbClr val="ABB9C7"/>
+                            <a:srgbClr val="64748B"/>
                           </a:solidFill>
                           <a:latin typeface="Arial"/>
                         </a:rPr>
@@ -7352,7 +7352,7 @@
                   </a:txBody>
                   <a:tcPr marL="54864" marR="45720" marT="22860" marB="22860">
                     <a:solidFill>
-                      <a:srgbClr val="1C2A3D"/>
+                      <a:srgbClr val="F1F5F9"/>
                     </a:solidFill>
                   </a:tcPr>
                 </a:tc>
@@ -7365,7 +7365,7 @@
                       <a:r>
                         <a:rPr sz="1000" b="0">
                           <a:solidFill>
-                            <a:srgbClr val="ABB9C7"/>
+                            <a:srgbClr val="64748B"/>
                           </a:solidFill>
                           <a:latin typeface="Arial"/>
                         </a:rPr>
@@ -7375,7 +7375,7 @@
                   </a:txBody>
                   <a:tcPr marL="54864" marR="45720" marT="22860" marB="22860">
                     <a:solidFill>
-                      <a:srgbClr val="1C2A3D"/>
+                      <a:srgbClr val="F1F5F9"/>
                     </a:solidFill>
                   </a:tcPr>
                 </a:tc>
@@ -7388,7 +7388,7 @@
                       <a:r>
                         <a:rPr sz="1000" b="0">
                           <a:solidFill>
-                            <a:srgbClr val="ABB9C7"/>
+                            <a:srgbClr val="64748B"/>
                           </a:solidFill>
                           <a:latin typeface="Arial"/>
                         </a:rPr>
@@ -7398,7 +7398,7 @@
                   </a:txBody>
                   <a:tcPr marL="54864" marR="45720" marT="22860" marB="22860">
                     <a:solidFill>
-                      <a:srgbClr val="1C2A3D"/>
+                      <a:srgbClr val="F1F5F9"/>
                     </a:solidFill>
                   </a:tcPr>
                 </a:tc>
@@ -7411,7 +7411,7 @@
                       <a:r>
                         <a:rPr sz="1000" b="0">
                           <a:solidFill>
-                            <a:srgbClr val="ABB9C7"/>
+                            <a:srgbClr val="64748B"/>
                           </a:solidFill>
                           <a:latin typeface="Arial"/>
                         </a:rPr>
@@ -7421,7 +7421,7 @@
                   </a:txBody>
                   <a:tcPr marL="54864" marR="45720" marT="22860" marB="22860">
                     <a:solidFill>
-                      <a:srgbClr val="1C2A3D"/>
+                      <a:srgbClr val="F1F5F9"/>
                     </a:solidFill>
                   </a:tcPr>
                 </a:tc>
@@ -7436,7 +7436,7 @@
                       <a:r>
                         <a:rPr sz="1000" b="0">
                           <a:solidFill>
-                            <a:srgbClr val="ABB9C7"/>
+                            <a:srgbClr val="64748B"/>
                           </a:solidFill>
                           <a:latin typeface="Arial"/>
                         </a:rPr>
@@ -7446,7 +7446,7 @@
                   </a:txBody>
                   <a:tcPr marL="54864" marR="45720" marT="22860" marB="22860">
                     <a:solidFill>
-                      <a:srgbClr val="1C2A3D"/>
+                      <a:srgbClr val="F1F5F9"/>
                     </a:solidFill>
                   </a:tcPr>
                 </a:tc>
@@ -7459,7 +7459,7 @@
                       <a:r>
                         <a:rPr sz="1000" b="0">
                           <a:solidFill>
-                            <a:srgbClr val="ABB9C7"/>
+                            <a:srgbClr val="64748B"/>
                           </a:solidFill>
                           <a:latin typeface="Arial"/>
                         </a:rPr>
@@ -7469,7 +7469,7 @@
                   </a:txBody>
                   <a:tcPr marL="54864" marR="45720" marT="22860" marB="22860">
                     <a:solidFill>
-                      <a:srgbClr val="1C2A3D"/>
+                      <a:srgbClr val="F1F5F9"/>
                     </a:solidFill>
                   </a:tcPr>
                 </a:tc>
@@ -7482,7 +7482,7 @@
                       <a:r>
                         <a:rPr sz="1000" b="0">
                           <a:solidFill>
-                            <a:srgbClr val="ABB9C7"/>
+                            <a:srgbClr val="64748B"/>
                           </a:solidFill>
                           <a:latin typeface="Arial"/>
                         </a:rPr>
@@ -7492,7 +7492,7 @@
                   </a:txBody>
                   <a:tcPr marL="54864" marR="45720" marT="22860" marB="22860">
                     <a:solidFill>
-                      <a:srgbClr val="1C2A3D"/>
+                      <a:srgbClr val="F1F5F9"/>
                     </a:solidFill>
                   </a:tcPr>
                 </a:tc>
@@ -7505,7 +7505,7 @@
                       <a:r>
                         <a:rPr sz="1000" b="0">
                           <a:solidFill>
-                            <a:srgbClr val="ABB9C7"/>
+                            <a:srgbClr val="64748B"/>
                           </a:solidFill>
                           <a:latin typeface="Arial"/>
                         </a:rPr>
@@ -7515,7 +7515,7 @@
                   </a:txBody>
                   <a:tcPr marL="54864" marR="45720" marT="22860" marB="22860">
                     <a:solidFill>
-                      <a:srgbClr val="1C2A3D"/>
+                      <a:srgbClr val="F1F5F9"/>
                     </a:solidFill>
                   </a:tcPr>
                 </a:tc>
@@ -7528,7 +7528,7 @@
                       <a:r>
                         <a:rPr sz="1000" b="0">
                           <a:solidFill>
-                            <a:srgbClr val="ABB9C7"/>
+                            <a:srgbClr val="64748B"/>
                           </a:solidFill>
                           <a:latin typeface="Arial"/>
                         </a:rPr>
@@ -7538,7 +7538,7 @@
                   </a:txBody>
                   <a:tcPr marL="54864" marR="45720" marT="22860" marB="22860">
                     <a:solidFill>
-                      <a:srgbClr val="1C2A3D"/>
+                      <a:srgbClr val="F1F5F9"/>
                     </a:solidFill>
                   </a:tcPr>
                 </a:tc>
@@ -7553,7 +7553,7 @@
                       <a:r>
                         <a:rPr sz="1000" b="0">
                           <a:solidFill>
-                            <a:srgbClr val="ABB9C7"/>
+                            <a:srgbClr val="64748B"/>
                           </a:solidFill>
                           <a:latin typeface="Arial"/>
                         </a:rPr>
@@ -7563,7 +7563,7 @@
                   </a:txBody>
                   <a:tcPr marL="54864" marR="45720" marT="22860" marB="22860">
                     <a:solidFill>
-                      <a:srgbClr val="1C2A3D"/>
+                      <a:srgbClr val="F1F5F9"/>
                     </a:solidFill>
                   </a:tcPr>
                 </a:tc>
@@ -7576,7 +7576,7 @@
                       <a:r>
                         <a:rPr sz="1000" b="0">
                           <a:solidFill>
-                            <a:srgbClr val="ABB9C7"/>
+                            <a:srgbClr val="64748B"/>
                           </a:solidFill>
                           <a:latin typeface="Arial"/>
                         </a:rPr>
@@ -7586,7 +7586,7 @@
                   </a:txBody>
                   <a:tcPr marL="54864" marR="45720" marT="22860" marB="22860">
                     <a:solidFill>
-                      <a:srgbClr val="1C2A3D"/>
+                      <a:srgbClr val="F1F5F9"/>
                     </a:solidFill>
                   </a:tcPr>
                 </a:tc>
@@ -7599,7 +7599,7 @@
                       <a:r>
                         <a:rPr sz="1000" b="0">
                           <a:solidFill>
-                            <a:srgbClr val="ABB9C7"/>
+                            <a:srgbClr val="64748B"/>
                           </a:solidFill>
                           <a:latin typeface="Arial"/>
                         </a:rPr>
@@ -7609,7 +7609,7 @@
                   </a:txBody>
                   <a:tcPr marL="54864" marR="45720" marT="22860" marB="22860">
                     <a:solidFill>
-                      <a:srgbClr val="1C2A3D"/>
+                      <a:srgbClr val="F1F5F9"/>
                     </a:solidFill>
                   </a:tcPr>
                 </a:tc>
@@ -7622,7 +7622,7 @@
                       <a:r>
                         <a:rPr sz="1000" b="0">
                           <a:solidFill>
-                            <a:srgbClr val="ABB9C7"/>
+                            <a:srgbClr val="64748B"/>
                           </a:solidFill>
                           <a:latin typeface="Arial"/>
                         </a:rPr>
@@ -7632,7 +7632,7 @@
                   </a:txBody>
                   <a:tcPr marL="54864" marR="45720" marT="22860" marB="22860">
                     <a:solidFill>
-                      <a:srgbClr val="1C2A3D"/>
+                      <a:srgbClr val="F1F5F9"/>
                     </a:solidFill>
                   </a:tcPr>
                 </a:tc>
@@ -7645,7 +7645,7 @@
                       <a:r>
                         <a:rPr sz="1000" b="0">
                           <a:solidFill>
-                            <a:srgbClr val="ABB9C7"/>
+                            <a:srgbClr val="64748B"/>
                           </a:solidFill>
                           <a:latin typeface="Arial"/>
                         </a:rPr>
@@ -7655,7 +7655,7 @@
                   </a:txBody>
                   <a:tcPr marL="54864" marR="45720" marT="22860" marB="22860">
                     <a:solidFill>
-                      <a:srgbClr val="1C2A3D"/>
+                      <a:srgbClr val="F1F5F9"/>
                     </a:solidFill>
                   </a:tcPr>
                 </a:tc>
@@ -7694,7 +7694,7 @@
             <a:r>
               <a:rPr sz="900" b="0">
                 <a:solidFill>
-                  <a:srgbClr val="ABB9C7"/>
+                  <a:srgbClr val="64748B"/>
                 </a:solidFill>
                 <a:latin typeface="Arial"/>
               </a:rPr>
@@ -7736,7 +7736,7 @@
             <a:avLst/>
           </a:prstGeom>
           <a:solidFill>
-            <a:srgbClr val="121B2A"/>
+            <a:srgbClr val="FFFFFF"/>
           </a:solidFill>
           <a:ln>
             <a:noFill/>
@@ -7794,7 +7794,7 @@
             <a:r>
               <a:rPr sz="1000" b="1">
                 <a:solidFill>
-                  <a:srgbClr val="4AB8A7"/>
+                  <a:srgbClr val="2E6F9E"/>
                 </a:solidFill>
                 <a:latin typeface="Arial"/>
               </a:rPr>
@@ -7833,7 +7833,7 @@
             <a:r>
               <a:rPr sz="2600" b="1">
                 <a:solidFill>
-                  <a:srgbClr val="EBF0F6"/>
+                  <a:srgbClr val="263238"/>
                 </a:solidFill>
                 <a:latin typeface="Arial"/>
               </a:rPr>
@@ -7872,7 +7872,7 @@
             <a:r>
               <a:rPr sz="1200" b="0">
                 <a:solidFill>
-                  <a:srgbClr val="ABB9C7"/>
+                  <a:srgbClr val="64748B"/>
                 </a:solidFill>
                 <a:latin typeface="Arial"/>
               </a:rPr>
@@ -7896,7 +7896,7 @@
             <a:avLst/>
           </a:prstGeom>
           <a:solidFill>
-            <a:srgbClr val="1C2A3D"/>
+            <a:srgbClr val="F1F5F9"/>
           </a:solidFill>
           <a:ln>
             <a:noFill/>
@@ -7954,7 +7954,7 @@
             <a:r>
               <a:rPr sz="900" b="0">
                 <a:solidFill>
-                  <a:srgbClr val="ABB9C7"/>
+                  <a:srgbClr val="64748B"/>
                 </a:solidFill>
                 <a:latin typeface="Arial"/>
               </a:rPr>
@@ -7993,7 +7993,7 @@
             <a:r>
               <a:rPr sz="1000" b="0">
                 <a:solidFill>
-                  <a:srgbClr val="ABB9C7"/>
+                  <a:srgbClr val="64748B"/>
                 </a:solidFill>
                 <a:latin typeface="Arial"/>
               </a:rPr>
@@ -8040,7 +8040,7 @@
                       <a:r>
                         <a:rPr sz="850" b="1">
                           <a:solidFill>
-                            <a:srgbClr val="EBF0F6"/>
+                            <a:srgbClr val="263238"/>
                           </a:solidFill>
                           <a:latin typeface="Arial"/>
                         </a:rPr>
@@ -8050,7 +8050,7 @@
                   </a:txBody>
                   <a:tcPr marL="54864" marR="45720" marT="22860" marB="22860">
                     <a:solidFill>
-                      <a:srgbClr val="2A3E52"/>
+                      <a:srgbClr val="DCE8F1"/>
                     </a:solidFill>
                   </a:tcPr>
                 </a:tc>
@@ -8063,7 +8063,7 @@
                       <a:r>
                         <a:rPr sz="850" b="1">
                           <a:solidFill>
-                            <a:srgbClr val="EBF0F6"/>
+                            <a:srgbClr val="263238"/>
                           </a:solidFill>
                           <a:latin typeface="Arial"/>
                         </a:rPr>
@@ -8073,7 +8073,7 @@
                   </a:txBody>
                   <a:tcPr marL="54864" marR="45720" marT="22860" marB="22860">
                     <a:solidFill>
-                      <a:srgbClr val="2A3E52"/>
+                      <a:srgbClr val="DCE8F1"/>
                     </a:solidFill>
                   </a:tcPr>
                 </a:tc>
@@ -8086,7 +8086,7 @@
                       <a:r>
                         <a:rPr sz="850" b="1">
                           <a:solidFill>
-                            <a:srgbClr val="EBF0F6"/>
+                            <a:srgbClr val="263238"/>
                           </a:solidFill>
                           <a:latin typeface="Arial"/>
                         </a:rPr>
@@ -8096,7 +8096,7 @@
                   </a:txBody>
                   <a:tcPr marL="54864" marR="45720" marT="22860" marB="22860">
                     <a:solidFill>
-                      <a:srgbClr val="2A3E52"/>
+                      <a:srgbClr val="DCE8F1"/>
                     </a:solidFill>
                   </a:tcPr>
                 </a:tc>
@@ -8109,7 +8109,7 @@
                       <a:r>
                         <a:rPr sz="850" b="1">
                           <a:solidFill>
-                            <a:srgbClr val="EBF0F6"/>
+                            <a:srgbClr val="263238"/>
                           </a:solidFill>
                           <a:latin typeface="Arial"/>
                         </a:rPr>
@@ -8119,7 +8119,7 @@
                   </a:txBody>
                   <a:tcPr marL="54864" marR="45720" marT="22860" marB="22860">
                     <a:solidFill>
-                      <a:srgbClr val="2A3E52"/>
+                      <a:srgbClr val="DCE8F1"/>
                     </a:solidFill>
                   </a:tcPr>
                 </a:tc>
@@ -8132,7 +8132,7 @@
                       <a:r>
                         <a:rPr sz="850" b="1">
                           <a:solidFill>
-                            <a:srgbClr val="EBF0F6"/>
+                            <a:srgbClr val="263238"/>
                           </a:solidFill>
                           <a:latin typeface="Arial"/>
                         </a:rPr>
@@ -8142,7 +8142,7 @@
                   </a:txBody>
                   <a:tcPr marL="54864" marR="45720" marT="22860" marB="22860">
                     <a:solidFill>
-                      <a:srgbClr val="2A3E52"/>
+                      <a:srgbClr val="DCE8F1"/>
                     </a:solidFill>
                   </a:tcPr>
                 </a:tc>
@@ -8155,7 +8155,7 @@
                       <a:r>
                         <a:rPr sz="850" b="1">
                           <a:solidFill>
-                            <a:srgbClr val="EBF0F6"/>
+                            <a:srgbClr val="263238"/>
                           </a:solidFill>
                           <a:latin typeface="Arial"/>
                         </a:rPr>
@@ -8165,7 +8165,7 @@
                   </a:txBody>
                   <a:tcPr marL="54864" marR="45720" marT="22860" marB="22860">
                     <a:solidFill>
-                      <a:srgbClr val="2A3E52"/>
+                      <a:srgbClr val="DCE8F1"/>
                     </a:solidFill>
                   </a:tcPr>
                 </a:tc>
@@ -8178,7 +8178,7 @@
                       <a:r>
                         <a:rPr sz="850" b="1">
                           <a:solidFill>
-                            <a:srgbClr val="EBF0F6"/>
+                            <a:srgbClr val="263238"/>
                           </a:solidFill>
                           <a:latin typeface="Arial"/>
                         </a:rPr>
@@ -8188,7 +8188,7 @@
                   </a:txBody>
                   <a:tcPr marL="54864" marR="45720" marT="22860" marB="22860">
                     <a:solidFill>
-                      <a:srgbClr val="2A3E52"/>
+                      <a:srgbClr val="DCE8F1"/>
                     </a:solidFill>
                   </a:tcPr>
                 </a:tc>
@@ -8201,7 +8201,7 @@
                       <a:r>
                         <a:rPr sz="850" b="1">
                           <a:solidFill>
-                            <a:srgbClr val="EBF0F6"/>
+                            <a:srgbClr val="263238"/>
                           </a:solidFill>
                           <a:latin typeface="Arial"/>
                         </a:rPr>
@@ -8211,7 +8211,7 @@
                   </a:txBody>
                   <a:tcPr marL="54864" marR="45720" marT="22860" marB="22860">
                     <a:solidFill>
-                      <a:srgbClr val="2A3E52"/>
+                      <a:srgbClr val="DCE8F1"/>
                     </a:solidFill>
                   </a:tcPr>
                 </a:tc>
@@ -8226,7 +8226,7 @@
                       <a:r>
                         <a:rPr sz="850" b="0">
                           <a:solidFill>
-                            <a:srgbClr val="ABB9C7"/>
+                            <a:srgbClr val="64748B"/>
                           </a:solidFill>
                           <a:latin typeface="Arial"/>
                         </a:rPr>
@@ -8236,7 +8236,7 @@
                   </a:txBody>
                   <a:tcPr marL="54864" marR="45720" marT="22860" marB="22860">
                     <a:solidFill>
-                      <a:srgbClr val="1C2A3D"/>
+                      <a:srgbClr val="F1F5F9"/>
                     </a:solidFill>
                   </a:tcPr>
                 </a:tc>
@@ -8249,7 +8249,7 @@
                       <a:r>
                         <a:rPr sz="850" b="0">
                           <a:solidFill>
-                            <a:srgbClr val="ABB9C7"/>
+                            <a:srgbClr val="64748B"/>
                           </a:solidFill>
                           <a:latin typeface="Arial"/>
                         </a:rPr>
@@ -8259,7 +8259,7 @@
                   </a:txBody>
                   <a:tcPr marL="54864" marR="45720" marT="22860" marB="22860">
                     <a:solidFill>
-                      <a:srgbClr val="1C2A3D"/>
+                      <a:srgbClr val="F1F5F9"/>
                     </a:solidFill>
                   </a:tcPr>
                 </a:tc>
@@ -8272,7 +8272,7 @@
                       <a:r>
                         <a:rPr sz="850" b="0">
                           <a:solidFill>
-                            <a:srgbClr val="ABB9C7"/>
+                            <a:srgbClr val="64748B"/>
                           </a:solidFill>
                           <a:latin typeface="Arial"/>
                         </a:rPr>
@@ -8282,7 +8282,7 @@
                   </a:txBody>
                   <a:tcPr marL="54864" marR="45720" marT="22860" marB="22860">
                     <a:solidFill>
-                      <a:srgbClr val="1C2A3D"/>
+                      <a:srgbClr val="F1F5F9"/>
                     </a:solidFill>
                   </a:tcPr>
                 </a:tc>
@@ -8295,7 +8295,7 @@
                       <a:r>
                         <a:rPr sz="850" b="0">
                           <a:solidFill>
-                            <a:srgbClr val="ABB9C7"/>
+                            <a:srgbClr val="64748B"/>
                           </a:solidFill>
                           <a:latin typeface="Arial"/>
                         </a:rPr>
@@ -8305,7 +8305,7 @@
                   </a:txBody>
                   <a:tcPr marL="54864" marR="45720" marT="22860" marB="22860">
                     <a:solidFill>
-                      <a:srgbClr val="1C2A3D"/>
+                      <a:srgbClr val="F1F5F9"/>
                     </a:solidFill>
                   </a:tcPr>
                 </a:tc>
@@ -8318,7 +8318,7 @@
                       <a:r>
                         <a:rPr sz="850" b="0">
                           <a:solidFill>
-                            <a:srgbClr val="ABB9C7"/>
+                            <a:srgbClr val="64748B"/>
                           </a:solidFill>
                           <a:latin typeface="Arial"/>
                         </a:rPr>
@@ -8328,7 +8328,7 @@
                   </a:txBody>
                   <a:tcPr marL="54864" marR="45720" marT="22860" marB="22860">
                     <a:solidFill>
-                      <a:srgbClr val="1C2A3D"/>
+                      <a:srgbClr val="F1F5F9"/>
                     </a:solidFill>
                   </a:tcPr>
                 </a:tc>
@@ -8341,7 +8341,7 @@
                       <a:r>
                         <a:rPr sz="850" b="0">
                           <a:solidFill>
-                            <a:srgbClr val="ABB9C7"/>
+                            <a:srgbClr val="64748B"/>
                           </a:solidFill>
                           <a:latin typeface="Arial"/>
                         </a:rPr>
@@ -8351,7 +8351,7 @@
                   </a:txBody>
                   <a:tcPr marL="54864" marR="45720" marT="22860" marB="22860">
                     <a:solidFill>
-                      <a:srgbClr val="1C2A3D"/>
+                      <a:srgbClr val="F1F5F9"/>
                     </a:solidFill>
                   </a:tcPr>
                 </a:tc>
@@ -8364,7 +8364,7 @@
                       <a:r>
                         <a:rPr sz="850" b="0">
                           <a:solidFill>
-                            <a:srgbClr val="ABB9C7"/>
+                            <a:srgbClr val="64748B"/>
                           </a:solidFill>
                           <a:latin typeface="Arial"/>
                         </a:rPr>
@@ -8374,7 +8374,7 @@
                   </a:txBody>
                   <a:tcPr marL="54864" marR="45720" marT="22860" marB="22860">
                     <a:solidFill>
-                      <a:srgbClr val="1C2A3D"/>
+                      <a:srgbClr val="F1F5F9"/>
                     </a:solidFill>
                   </a:tcPr>
                 </a:tc>
@@ -8387,7 +8387,7 @@
                       <a:r>
                         <a:rPr sz="850" b="0">
                           <a:solidFill>
-                            <a:srgbClr val="ABB9C7"/>
+                            <a:srgbClr val="64748B"/>
                           </a:solidFill>
                           <a:latin typeface="Arial"/>
                         </a:rPr>
@@ -8397,7 +8397,7 @@
                   </a:txBody>
                   <a:tcPr marL="54864" marR="45720" marT="22860" marB="22860">
                     <a:solidFill>
-                      <a:srgbClr val="1C2A3D"/>
+                      <a:srgbClr val="F1F5F9"/>
                     </a:solidFill>
                   </a:tcPr>
                 </a:tc>
@@ -8412,7 +8412,7 @@
                       <a:r>
                         <a:rPr sz="850" b="0">
                           <a:solidFill>
-                            <a:srgbClr val="ABB9C7"/>
+                            <a:srgbClr val="64748B"/>
                           </a:solidFill>
                           <a:latin typeface="Arial"/>
                         </a:rPr>
@@ -8422,7 +8422,7 @@
                   </a:txBody>
                   <a:tcPr marL="54864" marR="45720" marT="22860" marB="22860">
                     <a:solidFill>
-                      <a:srgbClr val="1C2A3D"/>
+                      <a:srgbClr val="F1F5F9"/>
                     </a:solidFill>
                   </a:tcPr>
                 </a:tc>
@@ -8435,7 +8435,7 @@
                       <a:r>
                         <a:rPr sz="850" b="0">
                           <a:solidFill>
-                            <a:srgbClr val="ABB9C7"/>
+                            <a:srgbClr val="64748B"/>
                           </a:solidFill>
                           <a:latin typeface="Arial"/>
                         </a:rPr>
@@ -8445,7 +8445,7 @@
                   </a:txBody>
                   <a:tcPr marL="54864" marR="45720" marT="22860" marB="22860">
                     <a:solidFill>
-                      <a:srgbClr val="1C2A3D"/>
+                      <a:srgbClr val="F1F5F9"/>
                     </a:solidFill>
                   </a:tcPr>
                 </a:tc>
@@ -8458,7 +8458,7 @@
                       <a:r>
                         <a:rPr sz="850" b="0">
                           <a:solidFill>
-                            <a:srgbClr val="ABB9C7"/>
+                            <a:srgbClr val="64748B"/>
                           </a:solidFill>
                           <a:latin typeface="Arial"/>
                         </a:rPr>
@@ -8468,7 +8468,7 @@
                   </a:txBody>
                   <a:tcPr marL="54864" marR="45720" marT="22860" marB="22860">
                     <a:solidFill>
-                      <a:srgbClr val="1C2A3D"/>
+                      <a:srgbClr val="F1F5F9"/>
                     </a:solidFill>
                   </a:tcPr>
                 </a:tc>
@@ -8481,7 +8481,7 @@
                       <a:r>
                         <a:rPr sz="850" b="0">
                           <a:solidFill>
-                            <a:srgbClr val="ABB9C7"/>
+                            <a:srgbClr val="64748B"/>
                           </a:solidFill>
                           <a:latin typeface="Arial"/>
                         </a:rPr>
@@ -8491,7 +8491,7 @@
                   </a:txBody>
                   <a:tcPr marL="54864" marR="45720" marT="22860" marB="22860">
                     <a:solidFill>
-                      <a:srgbClr val="1C2A3D"/>
+                      <a:srgbClr val="F1F5F9"/>
                     </a:solidFill>
                   </a:tcPr>
                 </a:tc>
@@ -8504,7 +8504,7 @@
                       <a:r>
                         <a:rPr sz="850" b="0">
                           <a:solidFill>
-                            <a:srgbClr val="ABB9C7"/>
+                            <a:srgbClr val="64748B"/>
                           </a:solidFill>
                           <a:latin typeface="Arial"/>
                         </a:rPr>
@@ -8514,7 +8514,7 @@
                   </a:txBody>
                   <a:tcPr marL="54864" marR="45720" marT="22860" marB="22860">
                     <a:solidFill>
-                      <a:srgbClr val="1C2A3D"/>
+                      <a:srgbClr val="F1F5F9"/>
                     </a:solidFill>
                   </a:tcPr>
                 </a:tc>
@@ -8527,7 +8527,7 @@
                       <a:r>
                         <a:rPr sz="850" b="0">
                           <a:solidFill>
-                            <a:srgbClr val="ABB9C7"/>
+                            <a:srgbClr val="64748B"/>
                           </a:solidFill>
                           <a:latin typeface="Arial"/>
                         </a:rPr>
@@ -8537,7 +8537,7 @@
                   </a:txBody>
                   <a:tcPr marL="54864" marR="45720" marT="22860" marB="22860">
                     <a:solidFill>
-                      <a:srgbClr val="1C2A3D"/>
+                      <a:srgbClr val="F1F5F9"/>
                     </a:solidFill>
                   </a:tcPr>
                 </a:tc>
@@ -8550,7 +8550,7 @@
                       <a:r>
                         <a:rPr sz="850" b="0">
                           <a:solidFill>
-                            <a:srgbClr val="ABB9C7"/>
+                            <a:srgbClr val="64748B"/>
                           </a:solidFill>
                           <a:latin typeface="Arial"/>
                         </a:rPr>
@@ -8560,7 +8560,7 @@
                   </a:txBody>
                   <a:tcPr marL="54864" marR="45720" marT="22860" marB="22860">
                     <a:solidFill>
-                      <a:srgbClr val="1C2A3D"/>
+                      <a:srgbClr val="F1F5F9"/>
                     </a:solidFill>
                   </a:tcPr>
                 </a:tc>
@@ -8573,7 +8573,7 @@
                       <a:r>
                         <a:rPr sz="850" b="0">
                           <a:solidFill>
-                            <a:srgbClr val="ABB9C7"/>
+                            <a:srgbClr val="64748B"/>
                           </a:solidFill>
                           <a:latin typeface="Arial"/>
                         </a:rPr>
@@ -8583,7 +8583,7 @@
                   </a:txBody>
                   <a:tcPr marL="54864" marR="45720" marT="22860" marB="22860">
                     <a:solidFill>
-                      <a:srgbClr val="1C2A3D"/>
+                      <a:srgbClr val="F1F5F9"/>
                     </a:solidFill>
                   </a:tcPr>
                 </a:tc>
@@ -8598,7 +8598,7 @@
                       <a:r>
                         <a:rPr sz="850" b="0">
                           <a:solidFill>
-                            <a:srgbClr val="ABB9C7"/>
+                            <a:srgbClr val="64748B"/>
                           </a:solidFill>
                           <a:latin typeface="Arial"/>
                         </a:rPr>
@@ -8608,7 +8608,7 @@
                   </a:txBody>
                   <a:tcPr marL="54864" marR="45720" marT="22860" marB="22860">
                     <a:solidFill>
-                      <a:srgbClr val="1C2A3D"/>
+                      <a:srgbClr val="F1F5F9"/>
                     </a:solidFill>
                   </a:tcPr>
                 </a:tc>
@@ -8621,7 +8621,7 @@
                       <a:r>
                         <a:rPr sz="850" b="0">
                           <a:solidFill>
-                            <a:srgbClr val="ABB9C7"/>
+                            <a:srgbClr val="64748B"/>
                           </a:solidFill>
                           <a:latin typeface="Arial"/>
                         </a:rPr>
@@ -8631,7 +8631,7 @@
                   </a:txBody>
                   <a:tcPr marL="54864" marR="45720" marT="22860" marB="22860">
                     <a:solidFill>
-                      <a:srgbClr val="1C2A3D"/>
+                      <a:srgbClr val="F1F5F9"/>
                     </a:solidFill>
                   </a:tcPr>
                 </a:tc>
@@ -8644,7 +8644,7 @@
                       <a:r>
                         <a:rPr sz="850" b="0">
                           <a:solidFill>
-                            <a:srgbClr val="ABB9C7"/>
+                            <a:srgbClr val="64748B"/>
                           </a:solidFill>
                           <a:latin typeface="Arial"/>
                         </a:rPr>
@@ -8654,7 +8654,7 @@
                   </a:txBody>
                   <a:tcPr marL="54864" marR="45720" marT="22860" marB="22860">
                     <a:solidFill>
-                      <a:srgbClr val="1C2A3D"/>
+                      <a:srgbClr val="F1F5F9"/>
                     </a:solidFill>
                   </a:tcPr>
                 </a:tc>
@@ -8667,7 +8667,7 @@
                       <a:r>
                         <a:rPr sz="850" b="0">
                           <a:solidFill>
-                            <a:srgbClr val="ABB9C7"/>
+                            <a:srgbClr val="64748B"/>
                           </a:solidFill>
                           <a:latin typeface="Arial"/>
                         </a:rPr>
@@ -8677,7 +8677,7 @@
                   </a:txBody>
                   <a:tcPr marL="54864" marR="45720" marT="22860" marB="22860">
                     <a:solidFill>
-                      <a:srgbClr val="1C2A3D"/>
+                      <a:srgbClr val="F1F5F9"/>
                     </a:solidFill>
                   </a:tcPr>
                 </a:tc>
@@ -8690,7 +8690,7 @@
                       <a:r>
                         <a:rPr sz="850" b="0">
                           <a:solidFill>
-                            <a:srgbClr val="ABB9C7"/>
+                            <a:srgbClr val="64748B"/>
                           </a:solidFill>
                           <a:latin typeface="Arial"/>
                         </a:rPr>
@@ -8700,7 +8700,7 @@
                   </a:txBody>
                   <a:tcPr marL="54864" marR="45720" marT="22860" marB="22860">
                     <a:solidFill>
-                      <a:srgbClr val="1C2A3D"/>
+                      <a:srgbClr val="F1F5F9"/>
                     </a:solidFill>
                   </a:tcPr>
                 </a:tc>
@@ -8713,7 +8713,7 @@
                       <a:r>
                         <a:rPr sz="850" b="0">
                           <a:solidFill>
-                            <a:srgbClr val="ABB9C7"/>
+                            <a:srgbClr val="64748B"/>
                           </a:solidFill>
                           <a:latin typeface="Arial"/>
                         </a:rPr>
@@ -8723,7 +8723,7 @@
                   </a:txBody>
                   <a:tcPr marL="54864" marR="45720" marT="22860" marB="22860">
                     <a:solidFill>
-                      <a:srgbClr val="1C2A3D"/>
+                      <a:srgbClr val="F1F5F9"/>
                     </a:solidFill>
                   </a:tcPr>
                 </a:tc>
@@ -8736,7 +8736,7 @@
                       <a:r>
                         <a:rPr sz="850" b="0">
                           <a:solidFill>
-                            <a:srgbClr val="ABB9C7"/>
+                            <a:srgbClr val="64748B"/>
                           </a:solidFill>
                           <a:latin typeface="Arial"/>
                         </a:rPr>
@@ -8746,7 +8746,7 @@
                   </a:txBody>
                   <a:tcPr marL="54864" marR="45720" marT="22860" marB="22860">
                     <a:solidFill>
-                      <a:srgbClr val="1C2A3D"/>
+                      <a:srgbClr val="F1F5F9"/>
                     </a:solidFill>
                   </a:tcPr>
                 </a:tc>
@@ -8759,7 +8759,7 @@
                       <a:r>
                         <a:rPr sz="850" b="0">
                           <a:solidFill>
-                            <a:srgbClr val="ABB9C7"/>
+                            <a:srgbClr val="64748B"/>
                           </a:solidFill>
                           <a:latin typeface="Arial"/>
                         </a:rPr>
@@ -8769,7 +8769,7 @@
                   </a:txBody>
                   <a:tcPr marL="54864" marR="45720" marT="22860" marB="22860">
                     <a:solidFill>
-                      <a:srgbClr val="1C2A3D"/>
+                      <a:srgbClr val="F1F5F9"/>
                     </a:solidFill>
                   </a:tcPr>
                 </a:tc>
@@ -8784,7 +8784,7 @@
                       <a:r>
                         <a:rPr sz="850" b="0">
                           <a:solidFill>
-                            <a:srgbClr val="ABB9C7"/>
+                            <a:srgbClr val="64748B"/>
                           </a:solidFill>
                           <a:latin typeface="Arial"/>
                         </a:rPr>
@@ -8794,7 +8794,7 @@
                   </a:txBody>
                   <a:tcPr marL="54864" marR="45720" marT="22860" marB="22860">
                     <a:solidFill>
-                      <a:srgbClr val="1C2A3D"/>
+                      <a:srgbClr val="F1F5F9"/>
                     </a:solidFill>
                   </a:tcPr>
                 </a:tc>
@@ -8807,7 +8807,7 @@
                       <a:r>
                         <a:rPr sz="850" b="0">
                           <a:solidFill>
-                            <a:srgbClr val="ABB9C7"/>
+                            <a:srgbClr val="64748B"/>
                           </a:solidFill>
                           <a:latin typeface="Arial"/>
                         </a:rPr>
@@ -8817,7 +8817,7 @@
                   </a:txBody>
                   <a:tcPr marL="54864" marR="45720" marT="22860" marB="22860">
                     <a:solidFill>
-                      <a:srgbClr val="1C2A3D"/>
+                      <a:srgbClr val="F1F5F9"/>
                     </a:solidFill>
                   </a:tcPr>
                 </a:tc>
@@ -8830,7 +8830,7 @@
                       <a:r>
                         <a:rPr sz="850" b="0">
                           <a:solidFill>
-                            <a:srgbClr val="ABB9C7"/>
+                            <a:srgbClr val="64748B"/>
                           </a:solidFill>
                           <a:latin typeface="Arial"/>
                         </a:rPr>
@@ -8840,7 +8840,7 @@
                   </a:txBody>
                   <a:tcPr marL="54864" marR="45720" marT="22860" marB="22860">
                     <a:solidFill>
-                      <a:srgbClr val="1C2A3D"/>
+                      <a:srgbClr val="F1F5F9"/>
                     </a:solidFill>
                   </a:tcPr>
                 </a:tc>
@@ -8853,7 +8853,7 @@
                       <a:r>
                         <a:rPr sz="850" b="0">
                           <a:solidFill>
-                            <a:srgbClr val="ABB9C7"/>
+                            <a:srgbClr val="64748B"/>
                           </a:solidFill>
                           <a:latin typeface="Arial"/>
                         </a:rPr>
@@ -8863,7 +8863,7 @@
                   </a:txBody>
                   <a:tcPr marL="54864" marR="45720" marT="22860" marB="22860">
                     <a:solidFill>
-                      <a:srgbClr val="1C2A3D"/>
+                      <a:srgbClr val="F1F5F9"/>
                     </a:solidFill>
                   </a:tcPr>
                 </a:tc>
@@ -8876,7 +8876,7 @@
                       <a:r>
                         <a:rPr sz="850" b="0">
                           <a:solidFill>
-                            <a:srgbClr val="ABB9C7"/>
+                            <a:srgbClr val="64748B"/>
                           </a:solidFill>
                           <a:latin typeface="Arial"/>
                         </a:rPr>
@@ -8886,7 +8886,7 @@
                   </a:txBody>
                   <a:tcPr marL="54864" marR="45720" marT="22860" marB="22860">
                     <a:solidFill>
-                      <a:srgbClr val="1C2A3D"/>
+                      <a:srgbClr val="F1F5F9"/>
                     </a:solidFill>
                   </a:tcPr>
                 </a:tc>
@@ -8899,7 +8899,7 @@
                       <a:r>
                         <a:rPr sz="850" b="0">
                           <a:solidFill>
-                            <a:srgbClr val="ABB9C7"/>
+                            <a:srgbClr val="64748B"/>
                           </a:solidFill>
                           <a:latin typeface="Arial"/>
                         </a:rPr>
@@ -8909,7 +8909,7 @@
                   </a:txBody>
                   <a:tcPr marL="54864" marR="45720" marT="22860" marB="22860">
                     <a:solidFill>
-                      <a:srgbClr val="1C2A3D"/>
+                      <a:srgbClr val="F1F5F9"/>
                     </a:solidFill>
                   </a:tcPr>
                 </a:tc>
@@ -8922,7 +8922,7 @@
                       <a:r>
                         <a:rPr sz="850" b="0">
                           <a:solidFill>
-                            <a:srgbClr val="ABB9C7"/>
+                            <a:srgbClr val="64748B"/>
                           </a:solidFill>
                           <a:latin typeface="Arial"/>
                         </a:rPr>
@@ -8932,7 +8932,7 @@
                   </a:txBody>
                   <a:tcPr marL="54864" marR="45720" marT="22860" marB="22860">
                     <a:solidFill>
-                      <a:srgbClr val="1C2A3D"/>
+                      <a:srgbClr val="F1F5F9"/>
                     </a:solidFill>
                   </a:tcPr>
                 </a:tc>
@@ -8945,7 +8945,7 @@
                       <a:r>
                         <a:rPr sz="850" b="0">
                           <a:solidFill>
-                            <a:srgbClr val="ABB9C7"/>
+                            <a:srgbClr val="64748B"/>
                           </a:solidFill>
                           <a:latin typeface="Arial"/>
                         </a:rPr>
@@ -8955,7 +8955,7 @@
                   </a:txBody>
                   <a:tcPr marL="54864" marR="45720" marT="22860" marB="22860">
                     <a:solidFill>
-                      <a:srgbClr val="1C2A3D"/>
+                      <a:srgbClr val="F1F5F9"/>
                     </a:solidFill>
                   </a:tcPr>
                 </a:tc>
@@ -8970,7 +8970,7 @@
                       <a:r>
                         <a:rPr sz="850" b="0">
                           <a:solidFill>
-                            <a:srgbClr val="ABB9C7"/>
+                            <a:srgbClr val="64748B"/>
                           </a:solidFill>
                           <a:latin typeface="Arial"/>
                         </a:rPr>
@@ -8980,7 +8980,7 @@
                   </a:txBody>
                   <a:tcPr marL="54864" marR="45720" marT="22860" marB="22860">
                     <a:solidFill>
-                      <a:srgbClr val="1C2A3D"/>
+                      <a:srgbClr val="F1F5F9"/>
                     </a:solidFill>
                   </a:tcPr>
                 </a:tc>
@@ -8993,7 +8993,7 @@
                       <a:r>
                         <a:rPr sz="850" b="0">
                           <a:solidFill>
-                            <a:srgbClr val="ABB9C7"/>
+                            <a:srgbClr val="64748B"/>
                           </a:solidFill>
                           <a:latin typeface="Arial"/>
                         </a:rPr>
@@ -9003,7 +9003,7 @@
                   </a:txBody>
                   <a:tcPr marL="54864" marR="45720" marT="22860" marB="22860">
                     <a:solidFill>
-                      <a:srgbClr val="1C2A3D"/>
+                      <a:srgbClr val="F1F5F9"/>
                     </a:solidFill>
                   </a:tcPr>
                 </a:tc>
@@ -9016,7 +9016,7 @@
                       <a:r>
                         <a:rPr sz="850" b="0">
                           <a:solidFill>
-                            <a:srgbClr val="ABB9C7"/>
+                            <a:srgbClr val="64748B"/>
                           </a:solidFill>
                           <a:latin typeface="Arial"/>
                         </a:rPr>
@@ -9026,7 +9026,7 @@
                   </a:txBody>
                   <a:tcPr marL="54864" marR="45720" marT="22860" marB="22860">
                     <a:solidFill>
-                      <a:srgbClr val="1C2A3D"/>
+                      <a:srgbClr val="F1F5F9"/>
                     </a:solidFill>
                   </a:tcPr>
                 </a:tc>
@@ -9039,7 +9039,7 @@
                       <a:r>
                         <a:rPr sz="850" b="0">
                           <a:solidFill>
-                            <a:srgbClr val="ABB9C7"/>
+                            <a:srgbClr val="64748B"/>
                           </a:solidFill>
                           <a:latin typeface="Arial"/>
                         </a:rPr>
@@ -9049,7 +9049,7 @@
                   </a:txBody>
                   <a:tcPr marL="54864" marR="45720" marT="22860" marB="22860">
                     <a:solidFill>
-                      <a:srgbClr val="1C2A3D"/>
+                      <a:srgbClr val="F1F5F9"/>
                     </a:solidFill>
                   </a:tcPr>
                 </a:tc>
@@ -9062,7 +9062,7 @@
                       <a:r>
                         <a:rPr sz="850" b="0">
                           <a:solidFill>
-                            <a:srgbClr val="ABB9C7"/>
+                            <a:srgbClr val="64748B"/>
                           </a:solidFill>
                           <a:latin typeface="Arial"/>
                         </a:rPr>
@@ -9072,7 +9072,7 @@
                   </a:txBody>
                   <a:tcPr marL="54864" marR="45720" marT="22860" marB="22860">
                     <a:solidFill>
-                      <a:srgbClr val="1C2A3D"/>
+                      <a:srgbClr val="F1F5F9"/>
                     </a:solidFill>
                   </a:tcPr>
                 </a:tc>
@@ -9085,7 +9085,7 @@
                       <a:r>
                         <a:rPr sz="850" b="0">
                           <a:solidFill>
-                            <a:srgbClr val="ABB9C7"/>
+                            <a:srgbClr val="64748B"/>
                           </a:solidFill>
                           <a:latin typeface="Arial"/>
                         </a:rPr>
@@ -9095,7 +9095,7 @@
                   </a:txBody>
                   <a:tcPr marL="54864" marR="45720" marT="22860" marB="22860">
                     <a:solidFill>
-                      <a:srgbClr val="1C2A3D"/>
+                      <a:srgbClr val="F1F5F9"/>
                     </a:solidFill>
                   </a:tcPr>
                 </a:tc>
@@ -9108,7 +9108,7 @@
                       <a:r>
                         <a:rPr sz="850" b="0">
                           <a:solidFill>
-                            <a:srgbClr val="ABB9C7"/>
+                            <a:srgbClr val="64748B"/>
                           </a:solidFill>
                           <a:latin typeface="Arial"/>
                         </a:rPr>
@@ -9118,7 +9118,7 @@
                   </a:txBody>
                   <a:tcPr marL="54864" marR="45720" marT="22860" marB="22860">
                     <a:solidFill>
-                      <a:srgbClr val="1C2A3D"/>
+                      <a:srgbClr val="F1F5F9"/>
                     </a:solidFill>
                   </a:tcPr>
                 </a:tc>
@@ -9131,7 +9131,7 @@
                       <a:r>
                         <a:rPr sz="850" b="0">
                           <a:solidFill>
-                            <a:srgbClr val="ABB9C7"/>
+                            <a:srgbClr val="64748B"/>
                           </a:solidFill>
                           <a:latin typeface="Arial"/>
                         </a:rPr>
@@ -9141,7 +9141,7 @@
                   </a:txBody>
                   <a:tcPr marL="54864" marR="45720" marT="22860" marB="22860">
                     <a:solidFill>
-                      <a:srgbClr val="1C2A3D"/>
+                      <a:srgbClr val="F1F5F9"/>
                     </a:solidFill>
                   </a:tcPr>
                 </a:tc>
@@ -9156,7 +9156,7 @@
                       <a:r>
                         <a:rPr sz="850" b="0">
                           <a:solidFill>
-                            <a:srgbClr val="ABB9C7"/>
+                            <a:srgbClr val="64748B"/>
                           </a:solidFill>
                           <a:latin typeface="Arial"/>
                         </a:rPr>
@@ -9166,7 +9166,7 @@
                   </a:txBody>
                   <a:tcPr marL="54864" marR="45720" marT="22860" marB="22860">
                     <a:solidFill>
-                      <a:srgbClr val="1C2A3D"/>
+                      <a:srgbClr val="F1F5F9"/>
                     </a:solidFill>
                   </a:tcPr>
                 </a:tc>
@@ -9179,7 +9179,7 @@
                       <a:r>
                         <a:rPr sz="850" b="0">
                           <a:solidFill>
-                            <a:srgbClr val="ABB9C7"/>
+                            <a:srgbClr val="64748B"/>
                           </a:solidFill>
                           <a:latin typeface="Arial"/>
                         </a:rPr>
@@ -9189,7 +9189,7 @@
                   </a:txBody>
                   <a:tcPr marL="54864" marR="45720" marT="22860" marB="22860">
                     <a:solidFill>
-                      <a:srgbClr val="1C2A3D"/>
+                      <a:srgbClr val="F1F5F9"/>
                     </a:solidFill>
                   </a:tcPr>
                 </a:tc>
@@ -9202,7 +9202,7 @@
                       <a:r>
                         <a:rPr sz="850" b="0">
                           <a:solidFill>
-                            <a:srgbClr val="ABB9C7"/>
+                            <a:srgbClr val="64748B"/>
                           </a:solidFill>
                           <a:latin typeface="Arial"/>
                         </a:rPr>
@@ -9212,7 +9212,7 @@
                   </a:txBody>
                   <a:tcPr marL="54864" marR="45720" marT="22860" marB="22860">
                     <a:solidFill>
-                      <a:srgbClr val="1C2A3D"/>
+                      <a:srgbClr val="F1F5F9"/>
                     </a:solidFill>
                   </a:tcPr>
                 </a:tc>
@@ -9225,7 +9225,7 @@
                       <a:r>
                         <a:rPr sz="850" b="0">
                           <a:solidFill>
-                            <a:srgbClr val="ABB9C7"/>
+                            <a:srgbClr val="64748B"/>
                           </a:solidFill>
                           <a:latin typeface="Arial"/>
                         </a:rPr>
@@ -9235,7 +9235,7 @@
                   </a:txBody>
                   <a:tcPr marL="54864" marR="45720" marT="22860" marB="22860">
                     <a:solidFill>
-                      <a:srgbClr val="1C2A3D"/>
+                      <a:srgbClr val="F1F5F9"/>
                     </a:solidFill>
                   </a:tcPr>
                 </a:tc>
@@ -9248,7 +9248,7 @@
                       <a:r>
                         <a:rPr sz="850" b="0">
                           <a:solidFill>
-                            <a:srgbClr val="ABB9C7"/>
+                            <a:srgbClr val="64748B"/>
                           </a:solidFill>
                           <a:latin typeface="Arial"/>
                         </a:rPr>
@@ -9258,7 +9258,7 @@
                   </a:txBody>
                   <a:tcPr marL="54864" marR="45720" marT="22860" marB="22860">
                     <a:solidFill>
-                      <a:srgbClr val="1C2A3D"/>
+                      <a:srgbClr val="F1F5F9"/>
                     </a:solidFill>
                   </a:tcPr>
                 </a:tc>
@@ -9271,7 +9271,7 @@
                       <a:r>
                         <a:rPr sz="850" b="0">
                           <a:solidFill>
-                            <a:srgbClr val="ABB9C7"/>
+                            <a:srgbClr val="64748B"/>
                           </a:solidFill>
                           <a:latin typeface="Arial"/>
                         </a:rPr>
@@ -9281,7 +9281,7 @@
                   </a:txBody>
                   <a:tcPr marL="54864" marR="45720" marT="22860" marB="22860">
                     <a:solidFill>
-                      <a:srgbClr val="1C2A3D"/>
+                      <a:srgbClr val="F1F5F9"/>
                     </a:solidFill>
                   </a:tcPr>
                 </a:tc>
@@ -9294,7 +9294,7 @@
                       <a:r>
                         <a:rPr sz="850" b="0">
                           <a:solidFill>
-                            <a:srgbClr val="ABB9C7"/>
+                            <a:srgbClr val="64748B"/>
                           </a:solidFill>
                           <a:latin typeface="Arial"/>
                         </a:rPr>
@@ -9304,7 +9304,7 @@
                   </a:txBody>
                   <a:tcPr marL="54864" marR="45720" marT="22860" marB="22860">
                     <a:solidFill>
-                      <a:srgbClr val="1C2A3D"/>
+                      <a:srgbClr val="F1F5F9"/>
                     </a:solidFill>
                   </a:tcPr>
                 </a:tc>
@@ -9317,7 +9317,7 @@
                       <a:r>
                         <a:rPr sz="850" b="0">
                           <a:solidFill>
-                            <a:srgbClr val="ABB9C7"/>
+                            <a:srgbClr val="64748B"/>
                           </a:solidFill>
                           <a:latin typeface="Arial"/>
                         </a:rPr>
@@ -9327,7 +9327,7 @@
                   </a:txBody>
                   <a:tcPr marL="54864" marR="45720" marT="22860" marB="22860">
                     <a:solidFill>
-                      <a:srgbClr val="1C2A3D"/>
+                      <a:srgbClr val="F1F5F9"/>
                     </a:solidFill>
                   </a:tcPr>
                 </a:tc>
@@ -9342,7 +9342,7 @@
                       <a:r>
                         <a:rPr sz="850" b="0">
                           <a:solidFill>
-                            <a:srgbClr val="ABB9C7"/>
+                            <a:srgbClr val="64748B"/>
                           </a:solidFill>
                           <a:latin typeface="Arial"/>
                         </a:rPr>
@@ -9352,7 +9352,7 @@
                   </a:txBody>
                   <a:tcPr marL="54864" marR="45720" marT="22860" marB="22860">
                     <a:solidFill>
-                      <a:srgbClr val="1C2A3D"/>
+                      <a:srgbClr val="F1F5F9"/>
                     </a:solidFill>
                   </a:tcPr>
                 </a:tc>
@@ -9365,7 +9365,7 @@
                       <a:r>
                         <a:rPr sz="850" b="0">
                           <a:solidFill>
-                            <a:srgbClr val="ABB9C7"/>
+                            <a:srgbClr val="64748B"/>
                           </a:solidFill>
                           <a:latin typeface="Arial"/>
                         </a:rPr>
@@ -9375,7 +9375,7 @@
                   </a:txBody>
                   <a:tcPr marL="54864" marR="45720" marT="22860" marB="22860">
                     <a:solidFill>
-                      <a:srgbClr val="1C2A3D"/>
+                      <a:srgbClr val="F1F5F9"/>
                     </a:solidFill>
                   </a:tcPr>
                 </a:tc>
@@ -9388,7 +9388,7 @@
                       <a:r>
                         <a:rPr sz="850" b="0">
                           <a:solidFill>
-                            <a:srgbClr val="ABB9C7"/>
+                            <a:srgbClr val="64748B"/>
                           </a:solidFill>
                           <a:latin typeface="Arial"/>
                         </a:rPr>
@@ -9398,7 +9398,7 @@
                   </a:txBody>
                   <a:tcPr marL="54864" marR="45720" marT="22860" marB="22860">
                     <a:solidFill>
-                      <a:srgbClr val="1C2A3D"/>
+                      <a:srgbClr val="F1F5F9"/>
                     </a:solidFill>
                   </a:tcPr>
                 </a:tc>
@@ -9411,7 +9411,7 @@
                       <a:r>
                         <a:rPr sz="850" b="0">
                           <a:solidFill>
-                            <a:srgbClr val="ABB9C7"/>
+                            <a:srgbClr val="64748B"/>
                           </a:solidFill>
                           <a:latin typeface="Arial"/>
                         </a:rPr>
@@ -9421,7 +9421,7 @@
                   </a:txBody>
                   <a:tcPr marL="54864" marR="45720" marT="22860" marB="22860">
                     <a:solidFill>
-                      <a:srgbClr val="1C2A3D"/>
+                      <a:srgbClr val="F1F5F9"/>
                     </a:solidFill>
                   </a:tcPr>
                 </a:tc>
@@ -9434,7 +9434,7 @@
                       <a:r>
                         <a:rPr sz="850" b="0">
                           <a:solidFill>
-                            <a:srgbClr val="ABB9C7"/>
+                            <a:srgbClr val="64748B"/>
                           </a:solidFill>
                           <a:latin typeface="Arial"/>
                         </a:rPr>
@@ -9444,7 +9444,7 @@
                   </a:txBody>
                   <a:tcPr marL="54864" marR="45720" marT="22860" marB="22860">
                     <a:solidFill>
-                      <a:srgbClr val="1C2A3D"/>
+                      <a:srgbClr val="F1F5F9"/>
                     </a:solidFill>
                   </a:tcPr>
                 </a:tc>
@@ -9457,7 +9457,7 @@
                       <a:r>
                         <a:rPr sz="850" b="0">
                           <a:solidFill>
-                            <a:srgbClr val="ABB9C7"/>
+                            <a:srgbClr val="64748B"/>
                           </a:solidFill>
                           <a:latin typeface="Arial"/>
                         </a:rPr>
@@ -9467,7 +9467,7 @@
                   </a:txBody>
                   <a:tcPr marL="54864" marR="45720" marT="22860" marB="22860">
                     <a:solidFill>
-                      <a:srgbClr val="1C2A3D"/>
+                      <a:srgbClr val="F1F5F9"/>
                     </a:solidFill>
                   </a:tcPr>
                 </a:tc>
@@ -9480,7 +9480,7 @@
                       <a:r>
                         <a:rPr sz="850" b="0">
                           <a:solidFill>
-                            <a:srgbClr val="ABB9C7"/>
+                            <a:srgbClr val="64748B"/>
                           </a:solidFill>
                           <a:latin typeface="Arial"/>
                         </a:rPr>
@@ -9490,7 +9490,7 @@
                   </a:txBody>
                   <a:tcPr marL="54864" marR="45720" marT="22860" marB="22860">
                     <a:solidFill>
-                      <a:srgbClr val="1C2A3D"/>
+                      <a:srgbClr val="F1F5F9"/>
                     </a:solidFill>
                   </a:tcPr>
                 </a:tc>
@@ -9503,7 +9503,7 @@
                       <a:r>
                         <a:rPr sz="850" b="0">
                           <a:solidFill>
-                            <a:srgbClr val="ABB9C7"/>
+                            <a:srgbClr val="64748B"/>
                           </a:solidFill>
                           <a:latin typeface="Arial"/>
                         </a:rPr>
@@ -9513,7 +9513,7 @@
                   </a:txBody>
                   <a:tcPr marL="54864" marR="45720" marT="22860" marB="22860">
                     <a:solidFill>
-                      <a:srgbClr val="1C2A3D"/>
+                      <a:srgbClr val="F1F5F9"/>
                     </a:solidFill>
                   </a:tcPr>
                 </a:tc>
@@ -9528,7 +9528,7 @@
                       <a:r>
                         <a:rPr sz="850" b="0">
                           <a:solidFill>
-                            <a:srgbClr val="ABB9C7"/>
+                            <a:srgbClr val="64748B"/>
                           </a:solidFill>
                           <a:latin typeface="Arial"/>
                         </a:rPr>
@@ -9538,7 +9538,7 @@
                   </a:txBody>
                   <a:tcPr marL="54864" marR="45720" marT="22860" marB="22860">
                     <a:solidFill>
-                      <a:srgbClr val="1C2A3D"/>
+                      <a:srgbClr val="F1F5F9"/>
                     </a:solidFill>
                   </a:tcPr>
                 </a:tc>
@@ -9551,7 +9551,7 @@
                       <a:r>
                         <a:rPr sz="850" b="0">
                           <a:solidFill>
-                            <a:srgbClr val="ABB9C7"/>
+                            <a:srgbClr val="64748B"/>
                           </a:solidFill>
                           <a:latin typeface="Arial"/>
                         </a:rPr>
@@ -9561,7 +9561,7 @@
                   </a:txBody>
                   <a:tcPr marL="54864" marR="45720" marT="22860" marB="22860">
                     <a:solidFill>
-                      <a:srgbClr val="1C2A3D"/>
+                      <a:srgbClr val="F1F5F9"/>
                     </a:solidFill>
                   </a:tcPr>
                 </a:tc>
@@ -9574,7 +9574,7 @@
                       <a:r>
                         <a:rPr sz="850" b="0">
                           <a:solidFill>
-                            <a:srgbClr val="ABB9C7"/>
+                            <a:srgbClr val="64748B"/>
                           </a:solidFill>
                           <a:latin typeface="Arial"/>
                         </a:rPr>
@@ -9584,7 +9584,7 @@
                   </a:txBody>
                   <a:tcPr marL="54864" marR="45720" marT="22860" marB="22860">
                     <a:solidFill>
-                      <a:srgbClr val="1C2A3D"/>
+                      <a:srgbClr val="F1F5F9"/>
                     </a:solidFill>
                   </a:tcPr>
                 </a:tc>
@@ -9597,7 +9597,7 @@
                       <a:r>
                         <a:rPr sz="850" b="0">
                           <a:solidFill>
-                            <a:srgbClr val="ABB9C7"/>
+                            <a:srgbClr val="64748B"/>
                           </a:solidFill>
                           <a:latin typeface="Arial"/>
                         </a:rPr>
@@ -9607,7 +9607,7 @@
                   </a:txBody>
                   <a:tcPr marL="54864" marR="45720" marT="22860" marB="22860">
                     <a:solidFill>
-                      <a:srgbClr val="1C2A3D"/>
+                      <a:srgbClr val="F1F5F9"/>
                     </a:solidFill>
                   </a:tcPr>
                 </a:tc>
@@ -9620,7 +9620,7 @@
                       <a:r>
                         <a:rPr sz="850" b="0">
                           <a:solidFill>
-                            <a:srgbClr val="ABB9C7"/>
+                            <a:srgbClr val="64748B"/>
                           </a:solidFill>
                           <a:latin typeface="Arial"/>
                         </a:rPr>
@@ -9630,7 +9630,7 @@
                   </a:txBody>
                   <a:tcPr marL="54864" marR="45720" marT="22860" marB="22860">
                     <a:solidFill>
-                      <a:srgbClr val="1C2A3D"/>
+                      <a:srgbClr val="F1F5F9"/>
                     </a:solidFill>
                   </a:tcPr>
                 </a:tc>
@@ -9643,7 +9643,7 @@
                       <a:r>
                         <a:rPr sz="850" b="0">
                           <a:solidFill>
-                            <a:srgbClr val="ABB9C7"/>
+                            <a:srgbClr val="64748B"/>
                           </a:solidFill>
                           <a:latin typeface="Arial"/>
                         </a:rPr>
@@ -9653,7 +9653,7 @@
                   </a:txBody>
                   <a:tcPr marL="54864" marR="45720" marT="22860" marB="22860">
                     <a:solidFill>
-                      <a:srgbClr val="1C2A3D"/>
+                      <a:srgbClr val="F1F5F9"/>
                     </a:solidFill>
                   </a:tcPr>
                 </a:tc>
@@ -9666,7 +9666,7 @@
                       <a:r>
                         <a:rPr sz="850" b="0">
                           <a:solidFill>
-                            <a:srgbClr val="ABB9C7"/>
+                            <a:srgbClr val="64748B"/>
                           </a:solidFill>
                           <a:latin typeface="Arial"/>
                         </a:rPr>
@@ -9676,7 +9676,7 @@
                   </a:txBody>
                   <a:tcPr marL="54864" marR="45720" marT="22860" marB="22860">
                     <a:solidFill>
-                      <a:srgbClr val="1C2A3D"/>
+                      <a:srgbClr val="F1F5F9"/>
                     </a:solidFill>
                   </a:tcPr>
                 </a:tc>
@@ -9689,7 +9689,7 @@
                       <a:r>
                         <a:rPr sz="850" b="0">
                           <a:solidFill>
-                            <a:srgbClr val="ABB9C7"/>
+                            <a:srgbClr val="64748B"/>
                           </a:solidFill>
                           <a:latin typeface="Arial"/>
                         </a:rPr>
@@ -9699,7 +9699,7 @@
                   </a:txBody>
                   <a:tcPr marL="54864" marR="45720" marT="22860" marB="22860">
                     <a:solidFill>
-                      <a:srgbClr val="1C2A3D"/>
+                      <a:srgbClr val="F1F5F9"/>
                     </a:solidFill>
                   </a:tcPr>
                 </a:tc>
@@ -9738,7 +9738,7 @@
             <a:r>
               <a:rPr sz="1000" b="0">
                 <a:solidFill>
-                  <a:srgbClr val="ABB9C7"/>
+                  <a:srgbClr val="64748B"/>
                 </a:solidFill>
                 <a:latin typeface="Arial"/>
               </a:rPr>
@@ -9780,7 +9780,7 @@
             <a:avLst/>
           </a:prstGeom>
           <a:solidFill>
-            <a:srgbClr val="121B2A"/>
+            <a:srgbClr val="FFFFFF"/>
           </a:solidFill>
           <a:ln>
             <a:noFill/>
@@ -9838,7 +9838,7 @@
             <a:r>
               <a:rPr sz="1000" b="1">
                 <a:solidFill>
-                  <a:srgbClr val="4AB8A7"/>
+                  <a:srgbClr val="2E6F9E"/>
                 </a:solidFill>
                 <a:latin typeface="Arial"/>
               </a:rPr>
@@ -9877,7 +9877,7 @@
             <a:r>
               <a:rPr sz="2600" b="1">
                 <a:solidFill>
-                  <a:srgbClr val="EBF0F6"/>
+                  <a:srgbClr val="263238"/>
                 </a:solidFill>
                 <a:latin typeface="Arial"/>
               </a:rPr>
@@ -9901,7 +9901,7 @@
             <a:avLst/>
           </a:prstGeom>
           <a:solidFill>
-            <a:srgbClr val="1C2A3D"/>
+            <a:srgbClr val="F1F5F9"/>
           </a:solidFill>
           <a:ln>
             <a:noFill/>
@@ -9959,7 +9959,7 @@
             <a:r>
               <a:rPr sz="900" b="0">
                 <a:solidFill>
-                  <a:srgbClr val="ABB9C7"/>
+                  <a:srgbClr val="64748B"/>
                 </a:solidFill>
                 <a:latin typeface="Arial"/>
               </a:rPr>
@@ -9998,7 +9998,7 @@
             <a:r>
               <a:rPr sz="1000" b="0">
                 <a:solidFill>
-                  <a:srgbClr val="ABB9C7"/>
+                  <a:srgbClr val="64748B"/>
                 </a:solidFill>
                 <a:latin typeface="Arial"/>
               </a:rPr>
@@ -10046,7 +10046,7 @@
             <a:avLst/>
           </a:prstGeom>
           <a:solidFill>
-            <a:srgbClr val="1C2A3D"/>
+            <a:srgbClr val="F1F5F9"/>
           </a:solidFill>
           <a:ln>
             <a:noFill/>
@@ -10104,7 +10104,7 @@
             <a:r>
               <a:rPr sz="2500" b="1">
                 <a:solidFill>
-                  <a:srgbClr val="5A89B2"/>
+                  <a:srgbClr val="2E6F9E"/>
                 </a:solidFill>
                 <a:latin typeface="Arial"/>
               </a:rPr>
@@ -10143,7 +10143,7 @@
             <a:r>
               <a:rPr sz="1200" b="1">
                 <a:solidFill>
-                  <a:srgbClr val="EBF0F6"/>
+                  <a:srgbClr val="263238"/>
                 </a:solidFill>
                 <a:latin typeface="Arial"/>
               </a:rPr>
@@ -10167,7 +10167,7 @@
             <a:avLst/>
           </a:prstGeom>
           <a:solidFill>
-            <a:srgbClr val="1C2A3D"/>
+            <a:srgbClr val="F1F5F9"/>
           </a:solidFill>
           <a:ln>
             <a:noFill/>
@@ -10225,7 +10225,7 @@
             <a:r>
               <a:rPr sz="2500" b="1">
                 <a:solidFill>
-                  <a:srgbClr val="E8874B"/>
+                  <a:srgbClr val="A8B4C0"/>
                 </a:solidFill>
                 <a:latin typeface="Arial"/>
               </a:rPr>
@@ -10264,7 +10264,7 @@
             <a:r>
               <a:rPr sz="1200" b="1">
                 <a:solidFill>
-                  <a:srgbClr val="EBF0F6"/>
+                  <a:srgbClr val="263238"/>
                 </a:solidFill>
                 <a:latin typeface="Arial"/>
               </a:rPr>
@@ -10288,7 +10288,7 @@
             <a:avLst/>
           </a:prstGeom>
           <a:solidFill>
-            <a:srgbClr val="1C2A3D"/>
+            <a:srgbClr val="F1F5F9"/>
           </a:solidFill>
           <a:ln>
             <a:noFill/>
@@ -10346,7 +10346,7 @@
             <a:r>
               <a:rPr sz="2500" b="1">
                 <a:solidFill>
-                  <a:srgbClr val="E8874B"/>
+                  <a:srgbClr val="A8B4C0"/>
                 </a:solidFill>
                 <a:latin typeface="Arial"/>
               </a:rPr>
@@ -10385,7 +10385,7 @@
             <a:r>
               <a:rPr sz="1200" b="1">
                 <a:solidFill>
-                  <a:srgbClr val="EBF0F6"/>
+                  <a:srgbClr val="263238"/>
                 </a:solidFill>
                 <a:latin typeface="Arial"/>
               </a:rPr>
@@ -10409,7 +10409,7 @@
             <a:avLst/>
           </a:prstGeom>
           <a:solidFill>
-            <a:srgbClr val="1C2A3D"/>
+            <a:srgbClr val="F1F5F9"/>
           </a:solidFill>
           <a:ln>
             <a:noFill/>
@@ -10467,7 +10467,7 @@
             <a:r>
               <a:rPr sz="2500" b="1">
                 <a:solidFill>
-                  <a:srgbClr val="4AB8A7"/>
+                  <a:srgbClr val="2E6F9E"/>
                 </a:solidFill>
                 <a:latin typeface="Arial"/>
               </a:rPr>
@@ -10506,7 +10506,7 @@
             <a:r>
               <a:rPr sz="1200" b="1">
                 <a:solidFill>
-                  <a:srgbClr val="EBF0F6"/>
+                  <a:srgbClr val="263238"/>
                 </a:solidFill>
                 <a:latin typeface="Arial"/>
               </a:rPr>
@@ -10545,7 +10545,7 @@
             <a:r>
               <a:rPr sz="1200" b="0">
                 <a:solidFill>
-                  <a:srgbClr val="ABB9C7"/>
+                  <a:srgbClr val="64748B"/>
                 </a:solidFill>
                 <a:latin typeface="Arial"/>
               </a:rPr>
@@ -10587,7 +10587,7 @@
             <a:avLst/>
           </a:prstGeom>
           <a:solidFill>
-            <a:srgbClr val="121B2A"/>
+            <a:srgbClr val="FFFFFF"/>
           </a:solidFill>
           <a:ln>
             <a:noFill/>
@@ -10645,7 +10645,7 @@
             <a:r>
               <a:rPr sz="1000" b="1">
                 <a:solidFill>
-                  <a:srgbClr val="4AB8A7"/>
+                  <a:srgbClr val="2E6F9E"/>
                 </a:solidFill>
                 <a:latin typeface="Arial"/>
               </a:rPr>
@@ -10684,7 +10684,7 @@
             <a:r>
               <a:rPr sz="2600" b="1">
                 <a:solidFill>
-                  <a:srgbClr val="EBF0F6"/>
+                  <a:srgbClr val="263238"/>
                 </a:solidFill>
                 <a:latin typeface="Arial"/>
               </a:rPr>
@@ -10708,7 +10708,7 @@
             <a:avLst/>
           </a:prstGeom>
           <a:solidFill>
-            <a:srgbClr val="1C2A3D"/>
+            <a:srgbClr val="F1F5F9"/>
           </a:solidFill>
           <a:ln>
             <a:noFill/>
@@ -10766,7 +10766,7 @@
             <a:r>
               <a:rPr sz="900" b="0">
                 <a:solidFill>
-                  <a:srgbClr val="ABB9C7"/>
+                  <a:srgbClr val="64748B"/>
                 </a:solidFill>
                 <a:latin typeface="Arial"/>
               </a:rPr>
@@ -10805,7 +10805,7 @@
             <a:r>
               <a:rPr sz="1000" b="0">
                 <a:solidFill>
-                  <a:srgbClr val="ABB9C7"/>
+                  <a:srgbClr val="64748B"/>
                 </a:solidFill>
                 <a:latin typeface="Arial"/>
               </a:rPr>
@@ -10829,7 +10829,7 @@
             <a:avLst/>
           </a:prstGeom>
           <a:solidFill>
-            <a:srgbClr val="1C2A3D"/>
+            <a:srgbClr val="F1F5F9"/>
           </a:solidFill>
           <a:ln>
             <a:noFill/>
@@ -10887,7 +10887,7 @@
             <a:r>
               <a:rPr sz="2500" b="1">
                 <a:solidFill>
-                  <a:srgbClr val="5A89B2"/>
+                  <a:srgbClr val="2E6F9E"/>
                 </a:solidFill>
                 <a:latin typeface="Arial"/>
               </a:rPr>
@@ -10926,7 +10926,7 @@
             <a:r>
               <a:rPr sz="1200" b="1">
                 <a:solidFill>
-                  <a:srgbClr val="EBF0F6"/>
+                  <a:srgbClr val="263238"/>
                 </a:solidFill>
                 <a:latin typeface="Arial"/>
               </a:rPr>
@@ -10950,7 +10950,7 @@
             <a:avLst/>
           </a:prstGeom>
           <a:solidFill>
-            <a:srgbClr val="1C2A3D"/>
+            <a:srgbClr val="F1F5F9"/>
           </a:solidFill>
           <a:ln>
             <a:noFill/>
@@ -11008,7 +11008,7 @@
             <a:r>
               <a:rPr sz="2500" b="1">
                 <a:solidFill>
-                  <a:srgbClr val="4AB8A7"/>
+                  <a:srgbClr val="2E6F9E"/>
                 </a:solidFill>
                 <a:latin typeface="Arial"/>
               </a:rPr>
@@ -11047,7 +11047,7 @@
             <a:r>
               <a:rPr sz="1200" b="1">
                 <a:solidFill>
-                  <a:srgbClr val="EBF0F6"/>
+                  <a:srgbClr val="263238"/>
                 </a:solidFill>
                 <a:latin typeface="Arial"/>
               </a:rPr>
@@ -11071,7 +11071,7 @@
             <a:avLst/>
           </a:prstGeom>
           <a:solidFill>
-            <a:srgbClr val="1C2A3D"/>
+            <a:srgbClr val="F1F5F9"/>
           </a:solidFill>
           <a:ln>
             <a:noFill/>
@@ -11129,7 +11129,7 @@
             <a:r>
               <a:rPr sz="2500" b="1">
                 <a:solidFill>
-                  <a:srgbClr val="E8874B"/>
+                  <a:srgbClr val="A8B4C0"/>
                 </a:solidFill>
                 <a:latin typeface="Arial"/>
               </a:rPr>
@@ -11168,7 +11168,7 @@
             <a:r>
               <a:rPr sz="1200" b="1">
                 <a:solidFill>
-                  <a:srgbClr val="EBF0F6"/>
+                  <a:srgbClr val="263238"/>
                 </a:solidFill>
                 <a:latin typeface="Arial"/>
               </a:rPr>
@@ -11192,7 +11192,7 @@
             <a:avLst/>
           </a:prstGeom>
           <a:solidFill>
-            <a:srgbClr val="E8874B"/>
+            <a:srgbClr val="A8B4C0"/>
           </a:solidFill>
           <a:ln>
             <a:noFill/>
@@ -11250,7 +11250,7 @@
             <a:r>
               <a:rPr sz="1400" b="0">
                 <a:solidFill>
-                  <a:srgbClr val="EBF0F6"/>
+                  <a:srgbClr val="263238"/>
                 </a:solidFill>
                 <a:latin typeface="Arial"/>
               </a:rPr>
@@ -11274,7 +11274,7 @@
             <a:avLst/>
           </a:prstGeom>
           <a:solidFill>
-            <a:srgbClr val="4AB8A7"/>
+            <a:srgbClr val="2E6F9E"/>
           </a:solidFill>
           <a:ln>
             <a:noFill/>
@@ -11332,7 +11332,7 @@
             <a:r>
               <a:rPr sz="1400" b="0">
                 <a:solidFill>
-                  <a:srgbClr val="EBF0F6"/>
+                  <a:srgbClr val="263238"/>
                 </a:solidFill>
                 <a:latin typeface="Arial"/>
               </a:rPr>
@@ -11356,7 +11356,7 @@
             <a:avLst/>
           </a:prstGeom>
           <a:solidFill>
-            <a:srgbClr val="4AB8A7"/>
+            <a:srgbClr val="2E6F9E"/>
           </a:solidFill>
           <a:ln>
             <a:noFill/>
@@ -11414,7 +11414,7 @@
             <a:r>
               <a:rPr sz="1400" b="0">
                 <a:solidFill>
-                  <a:srgbClr val="EBF0F6"/>
+                  <a:srgbClr val="263238"/>
                 </a:solidFill>
                 <a:latin typeface="Arial"/>
               </a:rPr>
@@ -11438,7 +11438,7 @@
             <a:avLst/>
           </a:prstGeom>
           <a:solidFill>
-            <a:srgbClr val="4AB8A7"/>
+            <a:srgbClr val="2E6F9E"/>
           </a:solidFill>
           <a:ln>
             <a:noFill/>
@@ -11496,7 +11496,7 @@
             <a:r>
               <a:rPr sz="1400" b="0">
                 <a:solidFill>
-                  <a:srgbClr val="EBF0F6"/>
+                  <a:srgbClr val="263238"/>
                 </a:solidFill>
                 <a:latin typeface="Arial"/>
               </a:rPr>
@@ -11538,7 +11538,7 @@
             <a:avLst/>
           </a:prstGeom>
           <a:solidFill>
-            <a:srgbClr val="121B2A"/>
+            <a:srgbClr val="FFFFFF"/>
           </a:solidFill>
           <a:ln>
             <a:noFill/>
@@ -11596,7 +11596,7 @@
             <a:r>
               <a:rPr sz="1000" b="1">
                 <a:solidFill>
-                  <a:srgbClr val="4AB8A7"/>
+                  <a:srgbClr val="2E6F9E"/>
                 </a:solidFill>
                 <a:latin typeface="Arial"/>
               </a:rPr>
@@ -11635,7 +11635,7 @@
             <a:r>
               <a:rPr sz="2600" b="1">
                 <a:solidFill>
-                  <a:srgbClr val="EBF0F6"/>
+                  <a:srgbClr val="263238"/>
                 </a:solidFill>
                 <a:latin typeface="Arial"/>
               </a:rPr>
@@ -11659,7 +11659,7 @@
             <a:avLst/>
           </a:prstGeom>
           <a:solidFill>
-            <a:srgbClr val="1C2A3D"/>
+            <a:srgbClr val="F1F5F9"/>
           </a:solidFill>
           <a:ln>
             <a:noFill/>
@@ -11717,7 +11717,7 @@
             <a:r>
               <a:rPr sz="900" b="0">
                 <a:solidFill>
-                  <a:srgbClr val="ABB9C7"/>
+                  <a:srgbClr val="64748B"/>
                 </a:solidFill>
                 <a:latin typeface="Arial"/>
               </a:rPr>
@@ -11756,7 +11756,7 @@
             <a:r>
               <a:rPr sz="1000" b="0">
                 <a:solidFill>
-                  <a:srgbClr val="ABB9C7"/>
+                  <a:srgbClr val="64748B"/>
                 </a:solidFill>
                 <a:latin typeface="Arial"/>
               </a:rPr>
@@ -11798,7 +11798,7 @@
                       <a:r>
                         <a:rPr sz="1400" b="1">
                           <a:solidFill>
-                            <a:srgbClr val="EBF0F6"/>
+                            <a:srgbClr val="263238"/>
                           </a:solidFill>
                           <a:latin typeface="Arial"/>
                         </a:rPr>
@@ -11808,7 +11808,7 @@
                   </a:txBody>
                   <a:tcPr marL="54864" marR="45720" marT="22860" marB="22860">
                     <a:solidFill>
-                      <a:srgbClr val="2A3E52"/>
+                      <a:srgbClr val="DCE8F1"/>
                     </a:solidFill>
                   </a:tcPr>
                 </a:tc>
@@ -11821,7 +11821,7 @@
                       <a:r>
                         <a:rPr sz="1400" b="1">
                           <a:solidFill>
-                            <a:srgbClr val="EBF0F6"/>
+                            <a:srgbClr val="263238"/>
                           </a:solidFill>
                           <a:latin typeface="Arial"/>
                         </a:rPr>
@@ -11831,7 +11831,7 @@
                   </a:txBody>
                   <a:tcPr marL="54864" marR="45720" marT="22860" marB="22860">
                     <a:solidFill>
-                      <a:srgbClr val="2A3E52"/>
+                      <a:srgbClr val="DCE8F1"/>
                     </a:solidFill>
                   </a:tcPr>
                 </a:tc>
@@ -11844,7 +11844,7 @@
                       <a:r>
                         <a:rPr sz="1400" b="1">
                           <a:solidFill>
-                            <a:srgbClr val="EBF0F6"/>
+                            <a:srgbClr val="263238"/>
                           </a:solidFill>
                           <a:latin typeface="Arial"/>
                         </a:rPr>
@@ -11854,7 +11854,7 @@
                   </a:txBody>
                   <a:tcPr marL="54864" marR="45720" marT="22860" marB="22860">
                     <a:solidFill>
-                      <a:srgbClr val="2A3E52"/>
+                      <a:srgbClr val="DCE8F1"/>
                     </a:solidFill>
                   </a:tcPr>
                 </a:tc>
@@ -11869,7 +11869,7 @@
                       <a:r>
                         <a:rPr sz="1400" b="0">
                           <a:solidFill>
-                            <a:srgbClr val="ABB9C7"/>
+                            <a:srgbClr val="64748B"/>
                           </a:solidFill>
                           <a:latin typeface="Arial"/>
                         </a:rPr>
@@ -11879,7 +11879,7 @@
                   </a:txBody>
                   <a:tcPr marL="54864" marR="45720" marT="22860" marB="22860">
                     <a:solidFill>
-                      <a:srgbClr val="1C2A3D"/>
+                      <a:srgbClr val="F1F5F9"/>
                     </a:solidFill>
                   </a:tcPr>
                 </a:tc>
@@ -11892,7 +11892,7 @@
                       <a:r>
                         <a:rPr sz="1400" b="0">
                           <a:solidFill>
-                            <a:srgbClr val="ABB9C7"/>
+                            <a:srgbClr val="64748B"/>
                           </a:solidFill>
                           <a:latin typeface="Arial"/>
                         </a:rPr>
@@ -11902,7 +11902,7 @@
                   </a:txBody>
                   <a:tcPr marL="54864" marR="45720" marT="22860" marB="22860">
                     <a:solidFill>
-                      <a:srgbClr val="1C2A3D"/>
+                      <a:srgbClr val="F1F5F9"/>
                     </a:solidFill>
                   </a:tcPr>
                 </a:tc>
@@ -11915,7 +11915,7 @@
                       <a:r>
                         <a:rPr sz="1400" b="0">
                           <a:solidFill>
-                            <a:srgbClr val="ABB9C7"/>
+                            <a:srgbClr val="64748B"/>
                           </a:solidFill>
                           <a:latin typeface="Arial"/>
                         </a:rPr>
@@ -11925,7 +11925,7 @@
                   </a:txBody>
                   <a:tcPr marL="54864" marR="45720" marT="22860" marB="22860">
                     <a:solidFill>
-                      <a:srgbClr val="1C2A3D"/>
+                      <a:srgbClr val="F1F5F9"/>
                     </a:solidFill>
                   </a:tcPr>
                 </a:tc>
@@ -11940,7 +11940,7 @@
                       <a:r>
                         <a:rPr sz="1400" b="0">
                           <a:solidFill>
-                            <a:srgbClr val="ABB9C7"/>
+                            <a:srgbClr val="64748B"/>
                           </a:solidFill>
                           <a:latin typeface="Arial"/>
                         </a:rPr>
@@ -11950,7 +11950,7 @@
                   </a:txBody>
                   <a:tcPr marL="54864" marR="45720" marT="22860" marB="22860">
                     <a:solidFill>
-                      <a:srgbClr val="1C2A3D"/>
+                      <a:srgbClr val="F1F5F9"/>
                     </a:solidFill>
                   </a:tcPr>
                 </a:tc>
@@ -11963,7 +11963,7 @@
                       <a:r>
                         <a:rPr sz="1400" b="0">
                           <a:solidFill>
-                            <a:srgbClr val="ABB9C7"/>
+                            <a:srgbClr val="64748B"/>
                           </a:solidFill>
                           <a:latin typeface="Arial"/>
                         </a:rPr>
@@ -11973,7 +11973,7 @@
                   </a:txBody>
                   <a:tcPr marL="54864" marR="45720" marT="22860" marB="22860">
                     <a:solidFill>
-                      <a:srgbClr val="1C2A3D"/>
+                      <a:srgbClr val="F1F5F9"/>
                     </a:solidFill>
                   </a:tcPr>
                 </a:tc>
@@ -11986,7 +11986,7 @@
                       <a:r>
                         <a:rPr sz="1400" b="0">
                           <a:solidFill>
-                            <a:srgbClr val="ABB9C7"/>
+                            <a:srgbClr val="64748B"/>
                           </a:solidFill>
                           <a:latin typeface="Arial"/>
                         </a:rPr>
@@ -11996,7 +11996,7 @@
                   </a:txBody>
                   <a:tcPr marL="54864" marR="45720" marT="22860" marB="22860">
                     <a:solidFill>
-                      <a:srgbClr val="1C2A3D"/>
+                      <a:srgbClr val="F1F5F9"/>
                     </a:solidFill>
                   </a:tcPr>
                 </a:tc>
@@ -12011,7 +12011,7 @@
                       <a:r>
                         <a:rPr sz="1400" b="0">
                           <a:solidFill>
-                            <a:srgbClr val="ABB9C7"/>
+                            <a:srgbClr val="64748B"/>
                           </a:solidFill>
                           <a:latin typeface="Arial"/>
                         </a:rPr>
@@ -12021,7 +12021,7 @@
                   </a:txBody>
                   <a:tcPr marL="54864" marR="45720" marT="22860" marB="22860">
                     <a:solidFill>
-                      <a:srgbClr val="1C2A3D"/>
+                      <a:srgbClr val="F1F5F9"/>
                     </a:solidFill>
                   </a:tcPr>
                 </a:tc>
@@ -12034,7 +12034,7 @@
                       <a:r>
                         <a:rPr sz="1400" b="0">
                           <a:solidFill>
-                            <a:srgbClr val="ABB9C7"/>
+                            <a:srgbClr val="64748B"/>
                           </a:solidFill>
                           <a:latin typeface="Arial"/>
                         </a:rPr>
@@ -12044,7 +12044,7 @@
                   </a:txBody>
                   <a:tcPr marL="54864" marR="45720" marT="22860" marB="22860">
                     <a:solidFill>
-                      <a:srgbClr val="1C2A3D"/>
+                      <a:srgbClr val="F1F5F9"/>
                     </a:solidFill>
                   </a:tcPr>
                 </a:tc>
@@ -12057,7 +12057,7 @@
                       <a:r>
                         <a:rPr sz="1400" b="0">
                           <a:solidFill>
-                            <a:srgbClr val="ABB9C7"/>
+                            <a:srgbClr val="64748B"/>
                           </a:solidFill>
                           <a:latin typeface="Arial"/>
                         </a:rPr>
@@ -12067,7 +12067,7 @@
                   </a:txBody>
                   <a:tcPr marL="54864" marR="45720" marT="22860" marB="22860">
                     <a:solidFill>
-                      <a:srgbClr val="1C2A3D"/>
+                      <a:srgbClr val="F1F5F9"/>
                     </a:solidFill>
                   </a:tcPr>
                 </a:tc>
@@ -12082,7 +12082,7 @@
                       <a:r>
                         <a:rPr sz="1400" b="0">
                           <a:solidFill>
-                            <a:srgbClr val="ABB9C7"/>
+                            <a:srgbClr val="64748B"/>
                           </a:solidFill>
                           <a:latin typeface="Arial"/>
                         </a:rPr>
@@ -12092,7 +12092,7 @@
                   </a:txBody>
                   <a:tcPr marL="54864" marR="45720" marT="22860" marB="22860">
                     <a:solidFill>
-                      <a:srgbClr val="1C2A3D"/>
+                      <a:srgbClr val="F1F5F9"/>
                     </a:solidFill>
                   </a:tcPr>
                 </a:tc>
@@ -12105,7 +12105,7 @@
                       <a:r>
                         <a:rPr sz="1400" b="0">
                           <a:solidFill>
-                            <a:srgbClr val="ABB9C7"/>
+                            <a:srgbClr val="64748B"/>
                           </a:solidFill>
                           <a:latin typeface="Arial"/>
                         </a:rPr>
@@ -12115,7 +12115,7 @@
                   </a:txBody>
                   <a:tcPr marL="54864" marR="45720" marT="22860" marB="22860">
                     <a:solidFill>
-                      <a:srgbClr val="1C2A3D"/>
+                      <a:srgbClr val="F1F5F9"/>
                     </a:solidFill>
                   </a:tcPr>
                 </a:tc>
@@ -12128,7 +12128,7 @@
                       <a:r>
                         <a:rPr sz="1400" b="0">
                           <a:solidFill>
-                            <a:srgbClr val="ABB9C7"/>
+                            <a:srgbClr val="64748B"/>
                           </a:solidFill>
                           <a:latin typeface="Arial"/>
                         </a:rPr>
@@ -12138,7 +12138,7 @@
                   </a:txBody>
                   <a:tcPr marL="54864" marR="45720" marT="22860" marB="22860">
                     <a:solidFill>
-                      <a:srgbClr val="1C2A3D"/>
+                      <a:srgbClr val="F1F5F9"/>
                     </a:solidFill>
                   </a:tcPr>
                 </a:tc>
@@ -12177,7 +12177,7 @@
             <a:r>
               <a:rPr sz="1700" b="1">
                 <a:solidFill>
-                  <a:srgbClr val="4AB8A7"/>
+                  <a:srgbClr val="2E6F9E"/>
                 </a:solidFill>
                 <a:latin typeface="Arial"/>
               </a:rPr>
@@ -12201,7 +12201,7 @@
             <a:avLst/>
           </a:prstGeom>
           <a:solidFill>
-            <a:srgbClr val="E8874B"/>
+            <a:srgbClr val="A8B4C0"/>
           </a:solidFill>
           <a:ln>
             <a:noFill/>
@@ -12259,7 +12259,7 @@
             <a:r>
               <a:rPr sz="1400" b="0">
                 <a:solidFill>
-                  <a:srgbClr val="EBF0F6"/>
+                  <a:srgbClr val="263238"/>
                 </a:solidFill>
                 <a:latin typeface="Arial"/>
               </a:rPr>
@@ -12283,7 +12283,7 @@
             <a:avLst/>
           </a:prstGeom>
           <a:solidFill>
-            <a:srgbClr val="4AB8A7"/>
+            <a:srgbClr val="2E6F9E"/>
           </a:solidFill>
           <a:ln>
             <a:noFill/>
@@ -12341,7 +12341,7 @@
             <a:r>
               <a:rPr sz="1400" b="0">
                 <a:solidFill>
-                  <a:srgbClr val="EBF0F6"/>
+                  <a:srgbClr val="263238"/>
                 </a:solidFill>
                 <a:latin typeface="Arial"/>
               </a:rPr>
@@ -12365,7 +12365,7 @@
             <a:avLst/>
           </a:prstGeom>
           <a:solidFill>
-            <a:srgbClr val="4AB8A7"/>
+            <a:srgbClr val="2E6F9E"/>
           </a:solidFill>
           <a:ln>
             <a:noFill/>
@@ -12423,7 +12423,7 @@
             <a:r>
               <a:rPr sz="1400" b="0">
                 <a:solidFill>
-                  <a:srgbClr val="EBF0F6"/>
+                  <a:srgbClr val="263238"/>
                 </a:solidFill>
                 <a:latin typeface="Arial"/>
               </a:rPr>
@@ -12447,7 +12447,7 @@
             <a:avLst/>
           </a:prstGeom>
           <a:solidFill>
-            <a:srgbClr val="4AB8A7"/>
+            <a:srgbClr val="2E6F9E"/>
           </a:solidFill>
           <a:ln>
             <a:noFill/>
@@ -12505,7 +12505,7 @@
             <a:r>
               <a:rPr sz="1400" b="0">
                 <a:solidFill>
-                  <a:srgbClr val="EBF0F6"/>
+                  <a:srgbClr val="263238"/>
                 </a:solidFill>
                 <a:latin typeface="Arial"/>
               </a:rPr>
@@ -12547,7 +12547,7 @@
             <a:avLst/>
           </a:prstGeom>
           <a:solidFill>
-            <a:srgbClr val="121B2A"/>
+            <a:srgbClr val="FFFFFF"/>
           </a:solidFill>
           <a:ln>
             <a:noFill/>
@@ -12605,7 +12605,7 @@
             <a:r>
               <a:rPr sz="1000" b="1">
                 <a:solidFill>
-                  <a:srgbClr val="4AB8A7"/>
+                  <a:srgbClr val="2E6F9E"/>
                 </a:solidFill>
                 <a:latin typeface="Arial"/>
               </a:rPr>
@@ -12644,7 +12644,7 @@
             <a:r>
               <a:rPr sz="2600" b="1">
                 <a:solidFill>
-                  <a:srgbClr val="EBF0F6"/>
+                  <a:srgbClr val="263238"/>
                 </a:solidFill>
                 <a:latin typeface="Arial"/>
               </a:rPr>
@@ -12668,7 +12668,7 @@
             <a:avLst/>
           </a:prstGeom>
           <a:solidFill>
-            <a:srgbClr val="1C2A3D"/>
+            <a:srgbClr val="F1F5F9"/>
           </a:solidFill>
           <a:ln>
             <a:noFill/>
@@ -12726,7 +12726,7 @@
             <a:r>
               <a:rPr sz="900" b="0">
                 <a:solidFill>
-                  <a:srgbClr val="ABB9C7"/>
+                  <a:srgbClr val="64748B"/>
                 </a:solidFill>
                 <a:latin typeface="Arial"/>
               </a:rPr>
@@ -12765,7 +12765,7 @@
             <a:r>
               <a:rPr sz="1000" b="0">
                 <a:solidFill>
-                  <a:srgbClr val="ABB9C7"/>
+                  <a:srgbClr val="64748B"/>
                 </a:solidFill>
                 <a:latin typeface="Arial"/>
               </a:rPr>
@@ -12789,7 +12789,7 @@
             <a:avLst/>
           </a:prstGeom>
           <a:solidFill>
-            <a:srgbClr val="1C2A3D"/>
+            <a:srgbClr val="F1F5F9"/>
           </a:solidFill>
           <a:ln>
             <a:noFill/>
@@ -12847,7 +12847,7 @@
             <a:r>
               <a:rPr sz="2500" b="1">
                 <a:solidFill>
-                  <a:srgbClr val="4AB8A7"/>
+                  <a:srgbClr val="2E6F9E"/>
                 </a:solidFill>
                 <a:latin typeface="Arial"/>
               </a:rPr>
@@ -12886,7 +12886,7 @@
             <a:r>
               <a:rPr sz="1200" b="1">
                 <a:solidFill>
-                  <a:srgbClr val="EBF0F6"/>
+                  <a:srgbClr val="263238"/>
                 </a:solidFill>
                 <a:latin typeface="Arial"/>
               </a:rPr>
@@ -12925,7 +12925,7 @@
             <a:r>
               <a:rPr sz="1000" b="0">
                 <a:solidFill>
-                  <a:srgbClr val="ABB9C7"/>
+                  <a:srgbClr val="64748B"/>
                 </a:solidFill>
                 <a:latin typeface="Arial"/>
               </a:rPr>
@@ -12964,7 +12964,7 @@
             <a:r>
               <a:rPr sz="2400" b="0">
                 <a:solidFill>
-                  <a:srgbClr val="ABB9C7"/>
+                  <a:srgbClr val="64748B"/>
                 </a:solidFill>
                 <a:latin typeface="Arial"/>
               </a:rPr>
@@ -12988,7 +12988,7 @@
             <a:avLst/>
           </a:prstGeom>
           <a:solidFill>
-            <a:srgbClr val="1C2A3D"/>
+            <a:srgbClr val="F1F5F9"/>
           </a:solidFill>
           <a:ln>
             <a:noFill/>
@@ -13046,7 +13046,7 @@
             <a:r>
               <a:rPr sz="2500" b="1">
                 <a:solidFill>
-                  <a:srgbClr val="4AB8A7"/>
+                  <a:srgbClr val="2E6F9E"/>
                 </a:solidFill>
                 <a:latin typeface="Arial"/>
               </a:rPr>
@@ -13085,7 +13085,7 @@
             <a:r>
               <a:rPr sz="1200" b="1">
                 <a:solidFill>
-                  <a:srgbClr val="EBF0F6"/>
+                  <a:srgbClr val="263238"/>
                 </a:solidFill>
                 <a:latin typeface="Arial"/>
               </a:rPr>
@@ -13124,7 +13124,7 @@
             <a:r>
               <a:rPr sz="1000" b="0">
                 <a:solidFill>
-                  <a:srgbClr val="ABB9C7"/>
+                  <a:srgbClr val="64748B"/>
                 </a:solidFill>
                 <a:latin typeface="Arial"/>
               </a:rPr>
@@ -13163,7 +13163,7 @@
             <a:r>
               <a:rPr sz="2400" b="0">
                 <a:solidFill>
-                  <a:srgbClr val="ABB9C7"/>
+                  <a:srgbClr val="64748B"/>
                 </a:solidFill>
                 <a:latin typeface="Arial"/>
               </a:rPr>
@@ -13187,7 +13187,7 @@
             <a:avLst/>
           </a:prstGeom>
           <a:solidFill>
-            <a:srgbClr val="1C2A3D"/>
+            <a:srgbClr val="F1F5F9"/>
           </a:solidFill>
           <a:ln>
             <a:noFill/>
@@ -13245,7 +13245,7 @@
             <a:r>
               <a:rPr sz="2500" b="1">
                 <a:solidFill>
-                  <a:srgbClr val="E8874B"/>
+                  <a:srgbClr val="A8B4C0"/>
                 </a:solidFill>
                 <a:latin typeface="Arial"/>
               </a:rPr>
@@ -13284,7 +13284,7 @@
             <a:r>
               <a:rPr sz="1200" b="1">
                 <a:solidFill>
-                  <a:srgbClr val="EBF0F6"/>
+                  <a:srgbClr val="263238"/>
                 </a:solidFill>
                 <a:latin typeface="Arial"/>
               </a:rPr>
@@ -13323,7 +13323,7 @@
             <a:r>
               <a:rPr sz="1000" b="0">
                 <a:solidFill>
-                  <a:srgbClr val="ABB9C7"/>
+                  <a:srgbClr val="64748B"/>
                 </a:solidFill>
                 <a:latin typeface="Arial"/>
               </a:rPr>
@@ -13362,7 +13362,7 @@
             <a:r>
               <a:rPr sz="1700" b="1">
                 <a:solidFill>
-                  <a:srgbClr val="EBF0F6"/>
+                  <a:srgbClr val="263238"/>
                 </a:solidFill>
                 <a:latin typeface="Arial"/>
               </a:rPr>
@@ -13401,7 +13401,7 @@
             <a:r>
               <a:rPr sz="1400" b="0">
                 <a:solidFill>
-                  <a:srgbClr val="ABB9C7"/>
+                  <a:srgbClr val="64748B"/>
                 </a:solidFill>
                 <a:latin typeface="Arial"/>
               </a:rPr>
@@ -13443,7 +13443,7 @@
             <a:avLst/>
           </a:prstGeom>
           <a:solidFill>
-            <a:srgbClr val="121B2A"/>
+            <a:srgbClr val="FFFFFF"/>
           </a:solidFill>
           <a:ln>
             <a:noFill/>
@@ -13501,7 +13501,7 @@
             <a:r>
               <a:rPr sz="1000" b="1">
                 <a:solidFill>
-                  <a:srgbClr val="4AB8A7"/>
+                  <a:srgbClr val="2E6F9E"/>
                 </a:solidFill>
                 <a:latin typeface="Arial"/>
               </a:rPr>
@@ -13540,7 +13540,7 @@
             <a:r>
               <a:rPr sz="2600" b="1">
                 <a:solidFill>
-                  <a:srgbClr val="EBF0F6"/>
+                  <a:srgbClr val="263238"/>
                 </a:solidFill>
                 <a:latin typeface="Arial"/>
               </a:rPr>
@@ -13564,7 +13564,7 @@
             <a:avLst/>
           </a:prstGeom>
           <a:solidFill>
-            <a:srgbClr val="1C2A3D"/>
+            <a:srgbClr val="F1F5F9"/>
           </a:solidFill>
           <a:ln>
             <a:noFill/>
@@ -13622,7 +13622,7 @@
             <a:r>
               <a:rPr sz="900" b="0">
                 <a:solidFill>
-                  <a:srgbClr val="ABB9C7"/>
+                  <a:srgbClr val="64748B"/>
                 </a:solidFill>
                 <a:latin typeface="Arial"/>
               </a:rPr>
@@ -13661,7 +13661,7 @@
             <a:r>
               <a:rPr sz="1000" b="0">
                 <a:solidFill>
-                  <a:srgbClr val="ABB9C7"/>
+                  <a:srgbClr val="64748B"/>
                 </a:solidFill>
                 <a:latin typeface="Arial"/>
               </a:rPr>
@@ -13685,7 +13685,7 @@
             <a:avLst/>
           </a:prstGeom>
           <a:solidFill>
-            <a:srgbClr val="1C2A3D"/>
+            <a:srgbClr val="F1F5F9"/>
           </a:solidFill>
           <a:ln>
             <a:noFill/>
@@ -13743,7 +13743,7 @@
             <a:r>
               <a:rPr sz="2500" b="1">
                 <a:solidFill>
-                  <a:srgbClr val="4AB8A7"/>
+                  <a:srgbClr val="2E6F9E"/>
                 </a:solidFill>
                 <a:latin typeface="Arial"/>
               </a:rPr>
@@ -13782,7 +13782,7 @@
             <a:r>
               <a:rPr sz="1200" b="1">
                 <a:solidFill>
-                  <a:srgbClr val="EBF0F6"/>
+                  <a:srgbClr val="263238"/>
                 </a:solidFill>
                 <a:latin typeface="Arial"/>
               </a:rPr>
@@ -13806,7 +13806,7 @@
             <a:avLst/>
           </a:prstGeom>
           <a:solidFill>
-            <a:srgbClr val="1C2A3D"/>
+            <a:srgbClr val="F1F5F9"/>
           </a:solidFill>
           <a:ln>
             <a:noFill/>
@@ -13864,7 +13864,7 @@
             <a:r>
               <a:rPr sz="2500" b="1">
                 <a:solidFill>
-                  <a:srgbClr val="5A89B2"/>
+                  <a:srgbClr val="2E6F9E"/>
                 </a:solidFill>
                 <a:latin typeface="Arial"/>
               </a:rPr>
@@ -13903,7 +13903,7 @@
             <a:r>
               <a:rPr sz="1200" b="1">
                 <a:solidFill>
-                  <a:srgbClr val="EBF0F6"/>
+                  <a:srgbClr val="263238"/>
                 </a:solidFill>
                 <a:latin typeface="Arial"/>
               </a:rPr>
@@ -13927,7 +13927,7 @@
             <a:avLst/>
           </a:prstGeom>
           <a:solidFill>
-            <a:srgbClr val="1C2A3D"/>
+            <a:srgbClr val="F1F5F9"/>
           </a:solidFill>
           <a:ln>
             <a:noFill/>
@@ -13985,7 +13985,7 @@
             <a:r>
               <a:rPr sz="2500" b="1">
                 <a:solidFill>
-                  <a:srgbClr val="E8874B"/>
+                  <a:srgbClr val="A8B4C0"/>
                 </a:solidFill>
                 <a:latin typeface="Arial"/>
               </a:rPr>
@@ -14024,7 +14024,7 @@
             <a:r>
               <a:rPr sz="1200" b="1">
                 <a:solidFill>
-                  <a:srgbClr val="EBF0F6"/>
+                  <a:srgbClr val="263238"/>
                 </a:solidFill>
                 <a:latin typeface="Arial"/>
               </a:rPr>
@@ -14048,7 +14048,7 @@
             <a:avLst/>
           </a:prstGeom>
           <a:solidFill>
-            <a:srgbClr val="E8874B"/>
+            <a:srgbClr val="A8B4C0"/>
           </a:solidFill>
           <a:ln>
             <a:noFill/>
@@ -14106,7 +14106,7 @@
             <a:r>
               <a:rPr sz="1400" b="0">
                 <a:solidFill>
-                  <a:srgbClr val="EBF0F6"/>
+                  <a:srgbClr val="263238"/>
                 </a:solidFill>
                 <a:latin typeface="Arial"/>
               </a:rPr>
@@ -14130,7 +14130,7 @@
             <a:avLst/>
           </a:prstGeom>
           <a:solidFill>
-            <a:srgbClr val="4AB8A7"/>
+            <a:srgbClr val="2E6F9E"/>
           </a:solidFill>
           <a:ln>
             <a:noFill/>
@@ -14188,7 +14188,7 @@
             <a:r>
               <a:rPr sz="1400" b="0">
                 <a:solidFill>
-                  <a:srgbClr val="EBF0F6"/>
+                  <a:srgbClr val="263238"/>
                 </a:solidFill>
                 <a:latin typeface="Arial"/>
               </a:rPr>
@@ -14212,7 +14212,7 @@
             <a:avLst/>
           </a:prstGeom>
           <a:solidFill>
-            <a:srgbClr val="4AB8A7"/>
+            <a:srgbClr val="2E6F9E"/>
           </a:solidFill>
           <a:ln>
             <a:noFill/>
@@ -14270,7 +14270,7 @@
             <a:r>
               <a:rPr sz="1400" b="0">
                 <a:solidFill>
-                  <a:srgbClr val="EBF0F6"/>
+                  <a:srgbClr val="263238"/>
                 </a:solidFill>
                 <a:latin typeface="Arial"/>
               </a:rPr>
@@ -14294,7 +14294,7 @@
             <a:avLst/>
           </a:prstGeom>
           <a:solidFill>
-            <a:srgbClr val="4AB8A7"/>
+            <a:srgbClr val="2E6F9E"/>
           </a:solidFill>
           <a:ln>
             <a:noFill/>
@@ -14352,7 +14352,7 @@
             <a:r>
               <a:rPr sz="1400" b="0">
                 <a:solidFill>
-                  <a:srgbClr val="EBF0F6"/>
+                  <a:srgbClr val="263238"/>
                 </a:solidFill>
                 <a:latin typeface="Arial"/>
               </a:rPr>
@@ -14394,7 +14394,7 @@
             <a:avLst/>
           </a:prstGeom>
           <a:solidFill>
-            <a:srgbClr val="121B2A"/>
+            <a:srgbClr val="FFFFFF"/>
           </a:solidFill>
           <a:ln>
             <a:noFill/>
@@ -14452,7 +14452,7 @@
             <a:r>
               <a:rPr sz="1000" b="1">
                 <a:solidFill>
-                  <a:srgbClr val="4AB8A7"/>
+                  <a:srgbClr val="2E6F9E"/>
                 </a:solidFill>
                 <a:latin typeface="Arial"/>
               </a:rPr>
@@ -14491,7 +14491,7 @@
             <a:r>
               <a:rPr sz="2600" b="1">
                 <a:solidFill>
-                  <a:srgbClr val="EBF0F6"/>
+                  <a:srgbClr val="263238"/>
                 </a:solidFill>
                 <a:latin typeface="Arial"/>
               </a:rPr>
@@ -14515,7 +14515,7 @@
             <a:avLst/>
           </a:prstGeom>
           <a:solidFill>
-            <a:srgbClr val="1C2A3D"/>
+            <a:srgbClr val="F1F5F9"/>
           </a:solidFill>
           <a:ln>
             <a:noFill/>
@@ -14573,7 +14573,7 @@
             <a:r>
               <a:rPr sz="900" b="0">
                 <a:solidFill>
-                  <a:srgbClr val="ABB9C7"/>
+                  <a:srgbClr val="64748B"/>
                 </a:solidFill>
                 <a:latin typeface="Arial"/>
               </a:rPr>
@@ -14612,7 +14612,7 @@
             <a:r>
               <a:rPr sz="1000" b="0">
                 <a:solidFill>
-                  <a:srgbClr val="ABB9C7"/>
+                  <a:srgbClr val="64748B"/>
                 </a:solidFill>
                 <a:latin typeface="Arial"/>
               </a:rPr>
@@ -14675,7 +14675,7 @@
             <a:r>
               <a:rPr sz="1100" b="0">
                 <a:solidFill>
-                  <a:srgbClr val="ABB9C7"/>
+                  <a:srgbClr val="64748B"/>
                 </a:solidFill>
                 <a:latin typeface="Arial"/>
               </a:rPr>
@@ -14717,7 +14717,7 @@
             <a:avLst/>
           </a:prstGeom>
           <a:solidFill>
-            <a:srgbClr val="121B2A"/>
+            <a:srgbClr val="FFFFFF"/>
           </a:solidFill>
           <a:ln>
             <a:noFill/>
@@ -14775,7 +14775,7 @@
             <a:r>
               <a:rPr sz="1000" b="1">
                 <a:solidFill>
-                  <a:srgbClr val="4AB8A7"/>
+                  <a:srgbClr val="2E6F9E"/>
                 </a:solidFill>
                 <a:latin typeface="Arial"/>
               </a:rPr>
@@ -14814,7 +14814,7 @@
             <a:r>
               <a:rPr sz="2600" b="1">
                 <a:solidFill>
-                  <a:srgbClr val="EBF0F6"/>
+                  <a:srgbClr val="263238"/>
                 </a:solidFill>
                 <a:latin typeface="Arial"/>
               </a:rPr>
@@ -14838,7 +14838,7 @@
             <a:avLst/>
           </a:prstGeom>
           <a:solidFill>
-            <a:srgbClr val="1C2A3D"/>
+            <a:srgbClr val="F1F5F9"/>
           </a:solidFill>
           <a:ln>
             <a:noFill/>
@@ -14896,7 +14896,7 @@
             <a:r>
               <a:rPr sz="900" b="0">
                 <a:solidFill>
-                  <a:srgbClr val="ABB9C7"/>
+                  <a:srgbClr val="64748B"/>
                 </a:solidFill>
                 <a:latin typeface="Arial"/>
               </a:rPr>
@@ -14935,7 +14935,7 @@
             <a:r>
               <a:rPr sz="1000" b="0">
                 <a:solidFill>
-                  <a:srgbClr val="ABB9C7"/>
+                  <a:srgbClr val="64748B"/>
                 </a:solidFill>
                 <a:latin typeface="Arial"/>
               </a:rPr>
@@ -14998,7 +14998,7 @@
             <a:r>
               <a:rPr sz="1100" b="0">
                 <a:solidFill>
-                  <a:srgbClr val="ABB9C7"/>
+                  <a:srgbClr val="64748B"/>
                 </a:solidFill>
                 <a:latin typeface="Arial"/>
               </a:rPr>
@@ -15040,7 +15040,7 @@
             <a:avLst/>
           </a:prstGeom>
           <a:solidFill>
-            <a:srgbClr val="121B2A"/>
+            <a:srgbClr val="FFFFFF"/>
           </a:solidFill>
           <a:ln>
             <a:noFill/>
@@ -15098,7 +15098,7 @@
             <a:r>
               <a:rPr sz="1000" b="1">
                 <a:solidFill>
-                  <a:srgbClr val="4AB8A7"/>
+                  <a:srgbClr val="2E6F9E"/>
                 </a:solidFill>
                 <a:latin typeface="Arial"/>
               </a:rPr>
@@ -15137,7 +15137,7 @@
             <a:r>
               <a:rPr sz="2600" b="1">
                 <a:solidFill>
-                  <a:srgbClr val="EBF0F6"/>
+                  <a:srgbClr val="263238"/>
                 </a:solidFill>
                 <a:latin typeface="Arial"/>
               </a:rPr>
@@ -15161,7 +15161,7 @@
             <a:avLst/>
           </a:prstGeom>
           <a:solidFill>
-            <a:srgbClr val="1C2A3D"/>
+            <a:srgbClr val="F1F5F9"/>
           </a:solidFill>
           <a:ln>
             <a:noFill/>
@@ -15219,7 +15219,7 @@
             <a:r>
               <a:rPr sz="900" b="0">
                 <a:solidFill>
-                  <a:srgbClr val="ABB9C7"/>
+                  <a:srgbClr val="64748B"/>
                 </a:solidFill>
                 <a:latin typeface="Arial"/>
               </a:rPr>
@@ -15258,7 +15258,7 @@
             <a:r>
               <a:rPr sz="1000" b="0">
                 <a:solidFill>
-                  <a:srgbClr val="ABB9C7"/>
+                  <a:srgbClr val="64748B"/>
                 </a:solidFill>
                 <a:latin typeface="Arial"/>
               </a:rPr>
@@ -15321,7 +15321,7 @@
             <a:r>
               <a:rPr sz="1200" b="0">
                 <a:solidFill>
-                  <a:srgbClr val="ABB9C7"/>
+                  <a:srgbClr val="64748B"/>
                 </a:solidFill>
                 <a:latin typeface="Arial"/>
               </a:rPr>

--- a/documentacion/presentacion/defensa_fraude.pptx
+++ b/documentacion/presentacion/defensa_fraude.pptx
@@ -3335,7 +3335,7 @@
                 </a:solidFill>
                 <a:latin typeface="Arial"/>
               </a:rPr>
-              <a:t>Integrantes: Fernando Valdés Gomez · Juan Muñoz Veloso</a:t>
+              <a:t>Integrantes: Fernando Alonso Valdés Gómez · Juan Francisco Muñoz Veloso</a:t>
             </a:r>
           </a:p>
         </p:txBody>
@@ -4345,7 +4345,7 @@
                 </a:solidFill>
                 <a:latin typeface="Arial"/>
               </a:rPr>
-              <a:t>84,923</a:t>
+              <a:t>84.923</a:t>
             </a:r>
           </a:p>
         </p:txBody>
@@ -4765,7 +4765,7 @@
                 </a:solidFill>
                 <a:latin typeface="Arial"/>
               </a:rPr>
-              <a:t>99.833%</a:t>
+              <a:t>99,833 %</a:t>
             </a:r>
           </a:p>
         </p:txBody>
@@ -4925,7 +4925,7 @@
                 </a:solidFill>
                 <a:latin typeface="Arial"/>
               </a:rPr>
-              <a:t>76.2% → 80.4%</a:t>
+              <a:t>76,2 % → 80,4 %</a:t>
             </a:r>
           </a:p>
         </p:txBody>
@@ -5085,7 +5085,7 @@
                 </a:solidFill>
                 <a:latin typeface="Arial"/>
               </a:rPr>
-              <a:t>67.5%</a:t>
+              <a:t>67,5 %</a:t>
             </a:r>
           </a:p>
         </p:txBody>
@@ -5409,7 +5409,7 @@
                 </a:solidFill>
                 <a:latin typeface="Arial"/>
               </a:rPr>
-              <a:t>El bosque con submuestreo detecta algo menos que el árbol compensado, pero eleva la precisión de 0,336 a 0,675.</a:t>
+              <a:t>El bosque con submuestreo detecta 2,7 puntos porcentuales menos que el árbol compensado, pero eleva la precisión de 0,336 a 0,675.</a:t>
             </a:r>
           </a:p>
         </p:txBody>
@@ -5751,7 +5751,7 @@
                 </a:solidFill>
                 <a:latin typeface="Arial"/>
               </a:rPr>
-              <a:t>80.4%</a:t>
+              <a:t>80,4 %</a:t>
             </a:r>
           </a:p>
         </p:txBody>
@@ -5829,7 +5829,7 @@
                 </a:solidFill>
                 <a:latin typeface="Arial"/>
               </a:rPr>
-              <a:t>FNR 19.6% · precisión 67.5%</a:t>
+              <a:t>FNR 19,6 % · precisión 67,5 %</a:t>
             </a:r>
           </a:p>
         </p:txBody>
@@ -6456,7 +6456,7 @@
                 </a:solidFill>
                 <a:latin typeface="Arial"/>
               </a:rPr>
-              <a:t>Cinco pliegues compartidos · sensibilidad y precisión de fraude</a:t>
+              <a:t>5 pliegues compartidos · sensibilidad y precisión de fraude</a:t>
             </a:r>
           </a:p>
         </p:txBody>
@@ -6807,7 +6807,7 @@
                           </a:solidFill>
                           <a:latin typeface="Arial"/>
                         </a:rPr>
-                        <a:t>79.3% ± 8.6%</a:t>
+                        <a:t>79,3 % ± 8,6 %</a:t>
                       </a:r>
                     </a:p>
                   </a:txBody>
@@ -6830,7 +6830,7 @@
                           </a:solidFill>
                           <a:latin typeface="Arial"/>
                         </a:rPr>
-                        <a:t>91.2%</a:t>
+                        <a:t>91,2 %</a:t>
                       </a:r>
                     </a:p>
                   </a:txBody>
@@ -6924,7 +6924,7 @@
                           </a:solidFill>
                           <a:latin typeface="Arial"/>
                         </a:rPr>
-                        <a:t>86.6% ± 6.1%</a:t>
+                        <a:t>86,6 % ± 6,1 %</a:t>
                       </a:r>
                     </a:p>
                   </a:txBody>
@@ -6947,7 +6947,7 @@
                           </a:solidFill>
                           <a:latin typeface="Arial"/>
                         </a:rPr>
-                        <a:t>37.5%</a:t>
+                        <a:t>37,5 %</a:t>
                       </a:r>
                     </a:p>
                   </a:txBody>
@@ -7041,7 +7041,7 @@
                           </a:solidFill>
                           <a:latin typeface="Arial"/>
                         </a:rPr>
-                        <a:t>69.6% ± 18.4%</a:t>
+                        <a:t>69,6 % ± 18,4 %</a:t>
                       </a:r>
                     </a:p>
                   </a:txBody>
@@ -7064,7 +7064,7 @@
                           </a:solidFill>
                           <a:latin typeface="Arial"/>
                         </a:rPr>
-                        <a:t>79.8%</a:t>
+                        <a:t>79,8 %</a:t>
                       </a:r>
                     </a:p>
                   </a:txBody>
@@ -7158,7 +7158,7 @@
                           </a:solidFill>
                           <a:latin typeface="Arial"/>
                         </a:rPr>
-                        <a:t>85.4% ± 6.4%</a:t>
+                        <a:t>85,4 % ± 6,4 %</a:t>
                       </a:r>
                     </a:p>
                   </a:txBody>
@@ -7181,7 +7181,7 @@
                           </a:solidFill>
                           <a:latin typeface="Arial"/>
                         </a:rPr>
-                        <a:t>18.6%</a:t>
+                        <a:t>18,6 %</a:t>
                       </a:r>
                     </a:p>
                   </a:txBody>
@@ -7252,7 +7252,7 @@
                           </a:solidFill>
                           <a:latin typeface="Arial"/>
                         </a:rPr>
-                        <a:t>C=10.0</a:t>
+                        <a:t>C=10</a:t>
                       </a:r>
                     </a:p>
                   </a:txBody>
@@ -7275,7 +7275,7 @@
                           </a:solidFill>
                           <a:latin typeface="Arial"/>
                         </a:rPr>
-                        <a:t>58.7% ± 15.6%</a:t>
+                        <a:t>58,7 % ± 15,6 %</a:t>
                       </a:r>
                     </a:p>
                   </a:txBody>
@@ -7298,7 +7298,7 @@
                           </a:solidFill>
                           <a:latin typeface="Arial"/>
                         </a:rPr>
-                        <a:t>88.5%</a:t>
+                        <a:t>88,5 %</a:t>
                       </a:r>
                     </a:p>
                   </a:txBody>
@@ -7369,7 +7369,7 @@
                           </a:solidFill>
                           <a:latin typeface="Arial"/>
                         </a:rPr>
-                        <a:t>C=10.0</a:t>
+                        <a:t>C=10</a:t>
                       </a:r>
                     </a:p>
                   </a:txBody>
@@ -7392,7 +7392,7 @@
                           </a:solidFill>
                           <a:latin typeface="Arial"/>
                         </a:rPr>
-                        <a:t>86.5% ± 9.3%</a:t>
+                        <a:t>86,5 % ± 9,3 %</a:t>
                       </a:r>
                     </a:p>
                   </a:txBody>
@@ -7415,7 +7415,7 @@
                           </a:solidFill>
                           <a:latin typeface="Arial"/>
                         </a:rPr>
-                        <a:t>21.2%</a:t>
+                        <a:t>21,2 %</a:t>
                       </a:r>
                     </a:p>
                   </a:txBody>
@@ -7509,7 +7509,7 @@
                           </a:solidFill>
                           <a:latin typeface="Arial"/>
                         </a:rPr>
-                        <a:t>74.3% ± 14.7%</a:t>
+                        <a:t>74,3 % ± 14,7 %</a:t>
                       </a:r>
                     </a:p>
                   </a:txBody>
@@ -7532,7 +7532,7 @@
                           </a:solidFill>
                           <a:latin typeface="Arial"/>
                         </a:rPr>
-                        <a:t>91.6%</a:t>
+                        <a:t>91,6 %</a:t>
                       </a:r>
                     </a:p>
                   </a:txBody>
@@ -7626,7 +7626,7 @@
                           </a:solidFill>
                           <a:latin typeface="Arial"/>
                         </a:rPr>
-                        <a:t>87.9% ± 5.5%</a:t>
+                        <a:t>87,9 % ± 5,5 %</a:t>
                       </a:r>
                     </a:p>
                   </a:txBody>
@@ -7649,7 +7649,7 @@
                           </a:solidFill>
                           <a:latin typeface="Arial"/>
                         </a:rPr>
-                        <a:t>45.0%</a:t>
+                        <a:t>45,0 %</a:t>
                       </a:r>
                     </a:p>
                   </a:txBody>
@@ -7698,7 +7698,7 @@
                 </a:solidFill>
                 <a:latin typeface="Arial"/>
               </a:rPr>
-              <a:t>Rangos evaluados: k-NN n_neighbors={3, 5, 7}; árbol max_depth={5, 10, None} y min_samples_leaf={1, 5}; SVM C={0.1, 1, 10}; bosque n_estimators={11, 21} y max_depth={6, 12}. El bosque usa max_features=√p.</a:t>
+              <a:t>Rangos evaluados: k-NN n_neighbors=3, 5, 7; Árbol de decisión max_depth=5, 10, libre; min_samples_leaf=1, 5; SVM lineal C=0,1, 1, 10; Random Forest propio n_estimators=11, 21; max_depth=6, 12. El bosque usa max_features=√p.</a:t>
             </a:r>
           </a:p>
         </p:txBody>
@@ -8276,7 +8276,7 @@
                           </a:solidFill>
                           <a:latin typeface="Arial"/>
                         </a:rPr>
-                        <a:t>74.6% ± 0.0 pp</a:t>
+                        <a:t>74,6 % ± 0,0 pp</a:t>
                       </a:r>
                     </a:p>
                   </a:txBody>
@@ -8299,7 +8299,7 @@
                           </a:solidFill>
                           <a:latin typeface="Arial"/>
                         </a:rPr>
-                        <a:t>99.996% ± 0.000 pp</a:t>
+                        <a:t>99,996 % ± 0,000 pp</a:t>
                       </a:r>
                     </a:p>
                   </a:txBody>
@@ -8322,7 +8322,7 @@
                           </a:solidFill>
                           <a:latin typeface="Arial"/>
                         </a:rPr>
-                        <a:t>97.2% ± 0.0 pp</a:t>
+                        <a:t>97,2 % ± 0,0 pp</a:t>
                       </a:r>
                     </a:p>
                   </a:txBody>
@@ -8345,7 +8345,7 @@
                           </a:solidFill>
                           <a:latin typeface="Arial"/>
                         </a:rPr>
-                        <a:t>84.5% ± 0.0 pp</a:t>
+                        <a:t>84,5 % ± 0,0 pp</a:t>
                       </a:r>
                     </a:p>
                   </a:txBody>
@@ -8368,7 +8368,7 @@
                           </a:solidFill>
                           <a:latin typeface="Arial"/>
                         </a:rPr>
-                        <a:t>99.95% ± 0.00 pp</a:t>
+                        <a:t>99,95 % ± 0,00 pp</a:t>
                       </a:r>
                     </a:p>
                   </a:txBody>
@@ -8391,7 +8391,7 @@
                           </a:solidFill>
                           <a:latin typeface="Arial"/>
                         </a:rPr>
-                        <a:t>25.4% ± 0.0 pp</a:t>
+                        <a:t>25,4 % ± 0,0 pp</a:t>
                       </a:r>
                     </a:p>
                   </a:txBody>
@@ -8462,7 +8462,7 @@
                           </a:solidFill>
                           <a:latin typeface="Arial"/>
                         </a:rPr>
-                        <a:t>83.4% ± 0.6 pp</a:t>
+                        <a:t>83,4 % ± 0,6 pp</a:t>
                       </a:r>
                     </a:p>
                   </a:txBody>
@@ -8485,7 +8485,7 @@
                           </a:solidFill>
                           <a:latin typeface="Arial"/>
                         </a:rPr>
-                        <a:t>99.681% ± 0.056 pp</a:t>
+                        <a:t>99,681 % ± 0,056 pp</a:t>
                       </a:r>
                     </a:p>
                   </a:txBody>
@@ -8508,7 +8508,7 @@
                           </a:solidFill>
                           <a:latin typeface="Arial"/>
                         </a:rPr>
-                        <a:t>30.7% ± 3.7 pp</a:t>
+                        <a:t>30,7 % ± 3,7 pp</a:t>
                       </a:r>
                     </a:p>
                   </a:txBody>
@@ -8531,7 +8531,7 @@
                           </a:solidFill>
                           <a:latin typeface="Arial"/>
                         </a:rPr>
-                        <a:t>44.8% ± 3.9 pp</a:t>
+                        <a:t>44,8 % ± 3,9 pp</a:t>
                       </a:r>
                     </a:p>
                   </a:txBody>
@@ -8554,7 +8554,7 @@
                           </a:solidFill>
                           <a:latin typeface="Arial"/>
                         </a:rPr>
-                        <a:t>99.65% ± 0.06 pp</a:t>
+                        <a:t>99,65 % ± 0,06 pp</a:t>
                       </a:r>
                     </a:p>
                   </a:txBody>
@@ -8577,7 +8577,7 @@
                           </a:solidFill>
                           <a:latin typeface="Arial"/>
                         </a:rPr>
-                        <a:t>16.6% ± 0.6 pp</a:t>
+                        <a:t>16,6 % ± 0,6 pp</a:t>
                       </a:r>
                     </a:p>
                   </a:txBody>
@@ -8648,7 +8648,7 @@
                           </a:solidFill>
                           <a:latin typeface="Arial"/>
                         </a:rPr>
-                        <a:t>63.5% ± 0.3 pp</a:t>
+                        <a:t>63,5 % ± 0,3 pp</a:t>
                       </a:r>
                     </a:p>
                   </a:txBody>
@@ -8671,7 +8671,7 @@
                           </a:solidFill>
                           <a:latin typeface="Arial"/>
                         </a:rPr>
-                        <a:t>99.990% ± 0.002 pp</a:t>
+                        <a:t>99,990 % ± 0,002 pp</a:t>
                       </a:r>
                     </a:p>
                   </a:txBody>
@@ -8694,7 +8694,7 @@
                           </a:solidFill>
                           <a:latin typeface="Arial"/>
                         </a:rPr>
-                        <a:t>91.1% ± 1.2 pp</a:t>
+                        <a:t>91,1 % ± 1,2 pp</a:t>
                       </a:r>
                     </a:p>
                   </a:txBody>
@@ -8717,7 +8717,7 @@
                           </a:solidFill>
                           <a:latin typeface="Arial"/>
                         </a:rPr>
-                        <a:t>74.9% ± 0.4 pp</a:t>
+                        <a:t>74,9 % ± 0,4 pp</a:t>
                       </a:r>
                     </a:p>
                   </a:txBody>
@@ -8740,7 +8740,7 @@
                           </a:solidFill>
                           <a:latin typeface="Arial"/>
                         </a:rPr>
-                        <a:t>99.93% ± 0.00 pp</a:t>
+                        <a:t>99,93 % ± 0,00 pp</a:t>
                       </a:r>
                     </a:p>
                   </a:txBody>
@@ -8763,7 +8763,7 @@
                           </a:solidFill>
                           <a:latin typeface="Arial"/>
                         </a:rPr>
-                        <a:t>36.5% ± 0.3 pp</a:t>
+                        <a:t>36,5 % ± 0,3 pp</a:t>
                       </a:r>
                     </a:p>
                   </a:txBody>
@@ -8834,7 +8834,7 @@
                           </a:solidFill>
                           <a:latin typeface="Arial"/>
                         </a:rPr>
-                        <a:t>83.1% ± 2.7 pp</a:t>
+                        <a:t>83,1 % ± 2,7 pp</a:t>
                       </a:r>
                     </a:p>
                   </a:txBody>
@@ -8857,7 +8857,7 @@
                           </a:solidFill>
                           <a:latin typeface="Arial"/>
                         </a:rPr>
-                        <a:t>99.692% ± 0.138 pp</a:t>
+                        <a:t>99,692 % ± 0,138 pp</a:t>
                       </a:r>
                     </a:p>
                   </a:txBody>
@@ -8880,7 +8880,7 @@
                           </a:solidFill>
                           <a:latin typeface="Arial"/>
                         </a:rPr>
-                        <a:t>33.6% ± 10.1 pp</a:t>
+                        <a:t>33,6 % ± 10,1 pp</a:t>
                       </a:r>
                     </a:p>
                   </a:txBody>
@@ -8903,7 +8903,7 @@
                           </a:solidFill>
                           <a:latin typeface="Arial"/>
                         </a:rPr>
-                        <a:t>47.0% ± 9.6 pp</a:t>
+                        <a:t>47,0 % ± 9,6 pp</a:t>
                       </a:r>
                     </a:p>
                   </a:txBody>
@@ -8926,7 +8926,7 @@
                           </a:solidFill>
                           <a:latin typeface="Arial"/>
                         </a:rPr>
-                        <a:t>99.66% ± 0.13 pp</a:t>
+                        <a:t>99,66 % ± 0,13 pp</a:t>
                       </a:r>
                     </a:p>
                   </a:txBody>
@@ -8949,7 +8949,7 @@
                           </a:solidFill>
                           <a:latin typeface="Arial"/>
                         </a:rPr>
-                        <a:t>16.9% ± 2.7 pp</a:t>
+                        <a:t>16,9 % ± 2,7 pp</a:t>
                       </a:r>
                     </a:p>
                   </a:txBody>
@@ -9020,7 +9020,7 @@
                           </a:solidFill>
                           <a:latin typeface="Arial"/>
                         </a:rPr>
-                        <a:t>52.1% ± 0.0 pp</a:t>
+                        <a:t>52,1 % ± 0,0 pp</a:t>
                       </a:r>
                     </a:p>
                   </a:txBody>
@@ -9043,7 +9043,7 @@
                           </a:solidFill>
                           <a:latin typeface="Arial"/>
                         </a:rPr>
-                        <a:t>99.987% ± 0.000 pp</a:t>
+                        <a:t>99,987 % ± 0,000 pp</a:t>
                       </a:r>
                     </a:p>
                   </a:txBody>
@@ -9066,7 +9066,7 @@
                           </a:solidFill>
                           <a:latin typeface="Arial"/>
                         </a:rPr>
-                        <a:t>87.1% ± 0.0 pp</a:t>
+                        <a:t>87,1 % ± 0,0 pp</a:t>
                       </a:r>
                     </a:p>
                   </a:txBody>
@@ -9089,7 +9089,7 @@
                           </a:solidFill>
                           <a:latin typeface="Arial"/>
                         </a:rPr>
-                        <a:t>65.2% ± 0.0 pp</a:t>
+                        <a:t>65,2 % ± 0,0 pp</a:t>
                       </a:r>
                     </a:p>
                   </a:txBody>
@@ -9112,7 +9112,7 @@
                           </a:solidFill>
                           <a:latin typeface="Arial"/>
                         </a:rPr>
-                        <a:t>99.91% ± 0.00 pp</a:t>
+                        <a:t>99,91 % ± 0,00 pp</a:t>
                       </a:r>
                     </a:p>
                   </a:txBody>
@@ -9135,7 +9135,7 @@
                           </a:solidFill>
                           <a:latin typeface="Arial"/>
                         </a:rPr>
-                        <a:t>47.9% ± 0.0 pp</a:t>
+                        <a:t>47,9 % ± 0,0 pp</a:t>
                       </a:r>
                     </a:p>
                   </a:txBody>
@@ -9206,7 +9206,7 @@
                           </a:solidFill>
                           <a:latin typeface="Arial"/>
                         </a:rPr>
-                        <a:t>81.0% ± 0.0 pp</a:t>
+                        <a:t>81,0 % ± 0,0 pp</a:t>
                       </a:r>
                     </a:p>
                   </a:txBody>
@@ -9229,7 +9229,7 @@
                           </a:solidFill>
                           <a:latin typeface="Arial"/>
                         </a:rPr>
-                        <a:t>99.885% ± 0.036 pp</a:t>
+                        <a:t>99,885 % ± 0,036 pp</a:t>
                       </a:r>
                     </a:p>
                   </a:txBody>
@@ -9252,7 +9252,7 @@
                           </a:solidFill>
                           <a:latin typeface="Arial"/>
                         </a:rPr>
-                        <a:t>54.8% ± 7.4 pp</a:t>
+                        <a:t>54,8 % ± 7,4 pp</a:t>
                       </a:r>
                     </a:p>
                   </a:txBody>
@@ -9275,7 +9275,7 @@
                           </a:solidFill>
                           <a:latin typeface="Arial"/>
                         </a:rPr>
-                        <a:t>65.2% ± 5.4 pp</a:t>
+                        <a:t>65,2 % ± 5,4 pp</a:t>
                       </a:r>
                     </a:p>
                   </a:txBody>
@@ -9298,7 +9298,7 @@
                           </a:solidFill>
                           <a:latin typeface="Arial"/>
                         </a:rPr>
-                        <a:t>99.85% ± 0.04 pp</a:t>
+                        <a:t>99,85 % ± 0,04 pp</a:t>
                       </a:r>
                     </a:p>
                   </a:txBody>
@@ -9321,7 +9321,7 @@
                           </a:solidFill>
                           <a:latin typeface="Arial"/>
                         </a:rPr>
-                        <a:t>19.0% ± 0.0 pp</a:t>
+                        <a:t>19,0 % ± 0,0 pp</a:t>
                       </a:r>
                     </a:p>
                   </a:txBody>
@@ -9392,7 +9392,7 @@
                           </a:solidFill>
                           <a:latin typeface="Arial"/>
                         </a:rPr>
-                        <a:t>76.2% ± 1.2 pp</a:t>
+                        <a:t>76,2 % ± 1,2 pp</a:t>
                       </a:r>
                     </a:p>
                   </a:txBody>
@@ -9415,7 +9415,7 @@
                           </a:solidFill>
                           <a:latin typeface="Arial"/>
                         </a:rPr>
-                        <a:t>99.993% ± 0.002 pp</a:t>
+                        <a:t>99,993 % ± 0,002 pp</a:t>
                       </a:r>
                     </a:p>
                   </a:txBody>
@@ -9438,7 +9438,7 @@
                           </a:solidFill>
                           <a:latin typeface="Arial"/>
                         </a:rPr>
-                        <a:t>94.6% ± 1.0 pp</a:t>
+                        <a:t>94,6 % ± 1,0 pp</a:t>
                       </a:r>
                     </a:p>
                   </a:txBody>
@@ -9461,7 +9461,7 @@
                           </a:solidFill>
                           <a:latin typeface="Arial"/>
                         </a:rPr>
-                        <a:t>84.4% ± 0.6 pp</a:t>
+                        <a:t>84,4 % ± 0,6 pp</a:t>
                       </a:r>
                     </a:p>
                   </a:txBody>
@@ -9484,7 +9484,7 @@
                           </a:solidFill>
                           <a:latin typeface="Arial"/>
                         </a:rPr>
-                        <a:t>99.95% ± 0.00 pp</a:t>
+                        <a:t>99,95 % ± 0,00 pp</a:t>
                       </a:r>
                     </a:p>
                   </a:txBody>
@@ -9507,7 +9507,7 @@
                           </a:solidFill>
                           <a:latin typeface="Arial"/>
                         </a:rPr>
-                        <a:t>23.8% ± 1.2 pp</a:t>
+                        <a:t>23,8 % ± 1,2 pp</a:t>
                       </a:r>
                     </a:p>
                   </a:txBody>
@@ -9578,7 +9578,7 @@
                           </a:solidFill>
                           <a:latin typeface="Arial"/>
                         </a:rPr>
-                        <a:t>80.4% ± 0.3 pp</a:t>
+                        <a:t>80,4 % ± 0,3 pp</a:t>
                       </a:r>
                     </a:p>
                   </a:txBody>
@@ -9601,7 +9601,7 @@
                           </a:solidFill>
                           <a:latin typeface="Arial"/>
                         </a:rPr>
-                        <a:t>99.935% ± 0.014 pp</a:t>
+                        <a:t>99,935 % ± 0,014 pp</a:t>
                       </a:r>
                     </a:p>
                   </a:txBody>
@@ -9624,7 +9624,7 @@
                           </a:solidFill>
                           <a:latin typeface="Arial"/>
                         </a:rPr>
-                        <a:t>67.5% ± 4.6 pp</a:t>
+                        <a:t>67,5 % ± 4,6 pp</a:t>
                       </a:r>
                     </a:p>
                   </a:txBody>
@@ -9647,7 +9647,7 @@
                           </a:solidFill>
                           <a:latin typeface="Arial"/>
                         </a:rPr>
-                        <a:t>73.3% ± 2.8 pp</a:t>
+                        <a:t>73,3 % ± 2,8 pp</a:t>
                       </a:r>
                     </a:p>
                   </a:txBody>
@@ -9670,7 +9670,7 @@
                           </a:solidFill>
                           <a:latin typeface="Arial"/>
                         </a:rPr>
-                        <a:t>99.90% ± 0.01 pp</a:t>
+                        <a:t>99,90 % ± 0,01 pp</a:t>
                       </a:r>
                     </a:p>
                   </a:txBody>
@@ -9693,7 +9693,7 @@
                           </a:solidFill>
                           <a:latin typeface="Arial"/>
                         </a:rPr>
-                        <a:t>19.6% ± 0.3 pp</a:t>
+                        <a:t>19,6 % ± 0,3 pp</a:t>
                       </a:r>
                     </a:p>
                   </a:txBody>
@@ -11336,7 +11336,7 @@
                 </a:solidFill>
                 <a:latin typeface="Arial"/>
               </a:rPr>
-              <a:t>Cinco pliegues estratificados y compartidos para comparar los modelos.</a:t>
+              <a:t>5 pliegues estratificados y compartidos para comparar los modelos.</a:t>
             </a:r>
           </a:p>
         </p:txBody>
@@ -14274,7 +14274,7 @@
                 </a:solidFill>
                 <a:latin typeface="Arial"/>
               </a:rPr>
-              <a:t>Elegida: Random Forest propio con submuestreo 1:10, sensibilidad 87.9% ± 5.5% y precisión 45.0% en CV.</a:t>
+              <a:t>Elegida: Random Forest propio con submuestreo 1:10, sensibilidad 87,9 % ± 5,5 % y precisión 45,0 % en CV.</a:t>
             </a:r>
           </a:p>
         </p:txBody>
